--- a/public/PV-Sistema-licenzirovanie.pptx
+++ b/public/PV-Sistema-licenzirovanie.pptx
@@ -15,6 +15,8 @@
     <p:sldId id="263" r:id="rId14"/>
     <p:sldId id="264" r:id="rId15"/>
     <p:sldId id="265" r:id="rId16"/>
+    <p:sldId id="267" r:id="rId18"/>
+    <p:sldId id="268" r:id="rId19"/>
     <p:sldId id="266" r:id="rId17"/>
   </p:sldIdLst>
   <p:sldSz cx="12191695" cy="6858000" type="screen4x3"/>
@@ -5301,6 +5303,4122 @@
 </file>
 
 <file path=ppt/slides/slide11.xml><?xml version="1.0" encoding="utf-8"?>
+<p:sld xmlns:a="http://schemas.openxmlformats.org/drawingml/2006/main" xmlns:p="http://schemas.openxmlformats.org/presentationml/2006/main" xmlns:r="http://schemas.openxmlformats.org/officeDocument/2006/relationships">
+  <p:cSld>
+    <p:spTree>
+      <p:nvGrpSpPr>
+        <p:cNvPr id="1" name=""/>
+        <p:cNvGrpSpPr/>
+        <p:nvPr/>
+      </p:nvGrpSpPr>
+      <p:grpSpPr/>
+      <p:sp>
+        <p:nvSpPr>
+          <p:cNvPr id="2" name="Rectangle 1"/>
+          <p:cNvSpPr/>
+          <p:nvPr/>
+        </p:nvSpPr>
+        <p:spPr>
+          <a:xfrm>
+            <a:off x="0" y="0"/>
+            <a:ext cx="12191695" cy="6858000"/>
+          </a:xfrm>
+          <a:prstGeom prst="rect">
+            <a:avLst/>
+          </a:prstGeom>
+          <a:solidFill>
+            <a:srgbClr val="FFFFFF"/>
+          </a:solidFill>
+          <a:ln>
+            <a:noFill/>
+          </a:ln>
+          <a:effectLst/>
+        </p:spPr>
+        <p:style>
+          <a:lnRef idx="1">
+            <a:schemeClr val="accent1"/>
+          </a:lnRef>
+          <a:fillRef idx="3">
+            <a:schemeClr val="accent1"/>
+          </a:fillRef>
+          <a:effectRef idx="2">
+            <a:schemeClr val="accent1"/>
+          </a:effectRef>
+          <a:fontRef idx="minor">
+            <a:schemeClr val="lt1"/>
+          </a:fontRef>
+        </p:style>
+        <p:txBody>
+          <a:bodyPr rtlCol="0" anchor="ctr"/>
+          <a:lstStyle/>
+          <a:p>
+            <a:pPr algn="ctr"/>
+          </a:p>
+        </p:txBody>
+      </p:sp>
+      <p:sp>
+        <p:nvSpPr>
+          <p:cNvPr id="3" name="Rectangle 2"/>
+          <p:cNvSpPr/>
+          <p:nvPr/>
+        </p:nvSpPr>
+        <p:spPr>
+          <a:xfrm>
+            <a:off x="0" y="0"/>
+            <a:ext cx="12191695" cy="1024128"/>
+          </a:xfrm>
+          <a:prstGeom prst="rect">
+            <a:avLst/>
+          </a:prstGeom>
+          <a:solidFill>
+            <a:srgbClr val="1A3A6B"/>
+          </a:solidFill>
+          <a:ln>
+            <a:noFill/>
+          </a:ln>
+          <a:effectLst/>
+        </p:spPr>
+        <p:style>
+          <a:lnRef idx="1">
+            <a:schemeClr val="accent1"/>
+          </a:lnRef>
+          <a:fillRef idx="3">
+            <a:schemeClr val="accent1"/>
+          </a:fillRef>
+          <a:effectRef idx="2">
+            <a:schemeClr val="accent1"/>
+          </a:effectRef>
+          <a:fontRef idx="minor">
+            <a:schemeClr val="lt1"/>
+          </a:fontRef>
+        </p:style>
+        <p:txBody>
+          <a:bodyPr rtlCol="0" anchor="ctr"/>
+          <a:lstStyle/>
+          <a:p>
+            <a:pPr algn="ctr"/>
+          </a:p>
+        </p:txBody>
+      </p:sp>
+      <p:sp>
+        <p:nvSpPr>
+          <p:cNvPr id="4" name="Rectangle 3"/>
+          <p:cNvSpPr/>
+          <p:nvPr/>
+        </p:nvSpPr>
+        <p:spPr>
+          <a:xfrm>
+            <a:off x="0" y="1024128"/>
+            <a:ext cx="12191695" cy="41148"/>
+          </a:xfrm>
+          <a:prstGeom prst="rect">
+            <a:avLst/>
+          </a:prstGeom>
+          <a:solidFill>
+            <a:srgbClr val="2563EB"/>
+          </a:solidFill>
+          <a:ln>
+            <a:noFill/>
+          </a:ln>
+          <a:effectLst/>
+        </p:spPr>
+        <p:style>
+          <a:lnRef idx="1">
+            <a:schemeClr val="accent1"/>
+          </a:lnRef>
+          <a:fillRef idx="3">
+            <a:schemeClr val="accent1"/>
+          </a:fillRef>
+          <a:effectRef idx="2">
+            <a:schemeClr val="accent1"/>
+          </a:effectRef>
+          <a:fontRef idx="minor">
+            <a:schemeClr val="lt1"/>
+          </a:fontRef>
+        </p:style>
+        <p:txBody>
+          <a:bodyPr rtlCol="0" anchor="ctr"/>
+          <a:lstStyle/>
+          <a:p>
+            <a:pPr algn="ctr"/>
+          </a:p>
+        </p:txBody>
+      </p:sp>
+      <p:sp>
+        <p:nvSpPr>
+          <p:cNvPr id="5" name="TextBox 4"/>
+          <p:cNvSpPr txBox="1"/>
+          <p:nvPr/>
+        </p:nvSpPr>
+        <p:spPr>
+          <a:xfrm>
+            <a:off x="566928" y="219456"/>
+            <a:ext cx="9692640" cy="457200"/>
+          </a:xfrm>
+          <a:prstGeom prst="rect">
+            <a:avLst/>
+          </a:prstGeom>
+          <a:noFill/>
+        </p:spPr>
+        <p:txBody>
+          <a:bodyPr wrap="square" lIns="0" rIns="0" tIns="0" bIns="0" anchor="t">
+            <a:spAutoFit/>
+          </a:bodyPr>
+          <a:lstStyle/>
+          <a:p>
+            <a:pPr algn="l">
+              <a:lnSpc>
+                <a:spcPct val="100000"/>
+              </a:lnSpc>
+            </a:pPr>
+            <a:r>
+              <a:rPr sz="2700" b="1" i="0">
+                <a:solidFill>
+                  <a:srgbClr val="FFFFFF"/>
+                </a:solidFill>
+                <a:latin typeface="Arial"/>
+              </a:rPr>
+              <a:t>Сколько рабочих мест нужно</a:t>
+            </a:r>
+          </a:p>
+        </p:txBody>
+      </p:sp>
+      <p:sp>
+        <p:nvSpPr>
+          <p:cNvPr id="6" name="TextBox 5"/>
+          <p:cNvSpPr txBox="1"/>
+          <p:nvPr/>
+        </p:nvSpPr>
+        <p:spPr>
+          <a:xfrm>
+            <a:off x="566928" y="676656"/>
+            <a:ext cx="9875520" cy="274320"/>
+          </a:xfrm>
+          <a:prstGeom prst="rect">
+            <a:avLst/>
+          </a:prstGeom>
+          <a:noFill/>
+        </p:spPr>
+        <p:txBody>
+          <a:bodyPr wrap="square" lIns="0" rIns="0" tIns="0" bIns="0" anchor="t">
+            <a:spAutoFit/>
+          </a:bodyPr>
+          <a:lstStyle/>
+          <a:p>
+            <a:pPr algn="l">
+              <a:lnSpc>
+                <a:spcPct val="100000"/>
+              </a:lnSpc>
+            </a:pPr>
+            <a:r>
+              <a:rPr sz="1250" b="0" i="0">
+                <a:solidFill>
+                  <a:srgbClr val="7CB8FB"/>
+                </a:solidFill>
+                <a:latin typeface="Arial"/>
+              </a:rPr>
+              <a:t>Расчёт от числа специалистов, работающих со схемой</a:t>
+            </a:r>
+          </a:p>
+        </p:txBody>
+      </p:sp>
+      <p:sp>
+        <p:nvSpPr>
+          <p:cNvPr id="7" name="TextBox 6"/>
+          <p:cNvSpPr txBox="1"/>
+          <p:nvPr/>
+        </p:nvSpPr>
+        <p:spPr>
+          <a:xfrm>
+            <a:off x="10820095" y="310896"/>
+            <a:ext cx="822960" cy="457200"/>
+          </a:xfrm>
+          <a:prstGeom prst="rect">
+            <a:avLst/>
+          </a:prstGeom>
+          <a:noFill/>
+        </p:spPr>
+        <p:txBody>
+          <a:bodyPr wrap="square" lIns="0" rIns="0" tIns="0" bIns="0" anchor="t">
+            <a:spAutoFit/>
+          </a:bodyPr>
+          <a:lstStyle/>
+          <a:p>
+            <a:pPr algn="r">
+              <a:lnSpc>
+                <a:spcPct val="100000"/>
+              </a:lnSpc>
+            </a:pPr>
+            <a:r>
+              <a:rPr sz="2200" b="1" i="0">
+                <a:solidFill>
+                  <a:srgbClr val="4A6BA0"/>
+                </a:solidFill>
+                <a:latin typeface="Arial"/>
+              </a:rPr>
+              <a:t>10</a:t>
+            </a:r>
+          </a:p>
+        </p:txBody>
+      </p:sp>
+      <p:sp>
+        <p:nvSpPr>
+          <p:cNvPr id="8" name="TextBox 7"/>
+          <p:cNvSpPr txBox="1"/>
+          <p:nvPr/>
+        </p:nvSpPr>
+        <p:spPr>
+          <a:xfrm>
+            <a:off x="566928" y="1371600"/>
+            <a:ext cx="11064240" cy="457200"/>
+          </a:xfrm>
+          <a:prstGeom prst="rect">
+            <a:avLst/>
+          </a:prstGeom>
+          <a:noFill/>
+        </p:spPr>
+        <p:txBody>
+          <a:bodyPr wrap="square" lIns="0" rIns="0" tIns="0" bIns="0" anchor="t">
+            <a:spAutoFit/>
+          </a:bodyPr>
+          <a:lstStyle/>
+          <a:p>
+            <a:pPr algn="l">
+              <a:lnSpc>
+                <a:spcPct val="130000"/>
+              </a:lnSpc>
+            </a:pPr>
+            <a:r>
+              <a:rPr sz="1350" b="0" i="0">
+                <a:solidFill>
+                  <a:srgbClr val="1F1F1F"/>
+                </a:solidFill>
+                <a:latin typeface="Arial"/>
+              </a:rPr>
+              <a:t>Место нужно каждому, кто сам работает со схемой и запускает расчёты. Тем, кто только</a:t>
+            </a:r>
+          </a:p>
+          <a:p>
+            <a:pPr algn="l">
+              <a:lnSpc>
+                <a:spcPct val="130000"/>
+              </a:lnSpc>
+            </a:pPr>
+            <a:r>
+              <a:rPr sz="1350" b="0" i="0">
+                <a:solidFill>
+                  <a:srgbClr val="1F1F1F"/>
+                </a:solidFill>
+                <a:latin typeface="Arial"/>
+              </a:rPr>
+              <a:t>смотрит готовые документы, лицензия не требуется — им передают отчёты и чертежи.</a:t>
+            </a:r>
+          </a:p>
+        </p:txBody>
+      </p:sp>
+      <p:sp>
+        <p:nvSpPr>
+          <p:cNvPr id="9" name="TextBox 8"/>
+          <p:cNvSpPr txBox="1"/>
+          <p:nvPr/>
+        </p:nvSpPr>
+        <p:spPr>
+          <a:xfrm>
+            <a:off x="566928" y="2011680"/>
+            <a:ext cx="5943600" cy="292608"/>
+          </a:xfrm>
+          <a:prstGeom prst="rect">
+            <a:avLst/>
+          </a:prstGeom>
+          <a:noFill/>
+        </p:spPr>
+        <p:txBody>
+          <a:bodyPr wrap="square" lIns="0" rIns="0" tIns="0" bIns="0" anchor="t">
+            <a:spAutoFit/>
+          </a:bodyPr>
+          <a:lstStyle/>
+          <a:p>
+            <a:pPr algn="l">
+              <a:lnSpc>
+                <a:spcPct val="100000"/>
+              </a:lnSpc>
+            </a:pPr>
+            <a:r>
+              <a:rPr sz="1650" b="1" i="0">
+                <a:solidFill>
+                  <a:srgbClr val="1A3A6B"/>
+                </a:solidFill>
+                <a:latin typeface="Arial"/>
+              </a:rPr>
+              <a:t>Типовой состав на один рудник</a:t>
+            </a:r>
+          </a:p>
+        </p:txBody>
+      </p:sp>
+      <p:sp>
+        <p:nvSpPr>
+          <p:cNvPr id="10" name="Rectangle 9"/>
+          <p:cNvSpPr/>
+          <p:nvPr/>
+        </p:nvSpPr>
+        <p:spPr>
+          <a:xfrm>
+            <a:off x="566928" y="2423160"/>
+            <a:ext cx="5943600" cy="402336"/>
+          </a:xfrm>
+          <a:prstGeom prst="rect">
+            <a:avLst/>
+          </a:prstGeom>
+          <a:solidFill>
+            <a:srgbClr val="1A3A6B"/>
+          </a:solidFill>
+          <a:ln>
+            <a:noFill/>
+          </a:ln>
+          <a:effectLst/>
+        </p:spPr>
+        <p:style>
+          <a:lnRef idx="1">
+            <a:schemeClr val="accent1"/>
+          </a:lnRef>
+          <a:fillRef idx="3">
+            <a:schemeClr val="accent1"/>
+          </a:fillRef>
+          <a:effectRef idx="2">
+            <a:schemeClr val="accent1"/>
+          </a:effectRef>
+          <a:fontRef idx="minor">
+            <a:schemeClr val="lt1"/>
+          </a:fontRef>
+        </p:style>
+        <p:txBody>
+          <a:bodyPr rtlCol="0" anchor="ctr"/>
+          <a:lstStyle/>
+          <a:p>
+            <a:pPr algn="ctr"/>
+          </a:p>
+        </p:txBody>
+      </p:sp>
+      <p:sp>
+        <p:nvSpPr>
+          <p:cNvPr id="11" name="TextBox 10"/>
+          <p:cNvSpPr txBox="1"/>
+          <p:nvPr/>
+        </p:nvSpPr>
+        <p:spPr>
+          <a:xfrm>
+            <a:off x="694944" y="2500884"/>
+            <a:ext cx="1929384" cy="402336"/>
+          </a:xfrm>
+          <a:prstGeom prst="rect">
+            <a:avLst/>
+          </a:prstGeom>
+          <a:noFill/>
+        </p:spPr>
+        <p:txBody>
+          <a:bodyPr wrap="square" lIns="0" rIns="0" tIns="0" bIns="0" anchor="t">
+            <a:spAutoFit/>
+          </a:bodyPr>
+          <a:lstStyle/>
+          <a:p>
+            <a:pPr algn="l">
+              <a:lnSpc>
+                <a:spcPct val="100000"/>
+              </a:lnSpc>
+            </a:pPr>
+            <a:r>
+              <a:rPr sz="1100" b="1" i="0">
+                <a:solidFill>
+                  <a:srgbClr val="FFFFFF"/>
+                </a:solidFill>
+                <a:latin typeface="Arial"/>
+              </a:rPr>
+              <a:t>Специалист</a:t>
+            </a:r>
+          </a:p>
+        </p:txBody>
+      </p:sp>
+      <p:sp>
+        <p:nvSpPr>
+          <p:cNvPr id="12" name="TextBox 11"/>
+          <p:cNvSpPr txBox="1"/>
+          <p:nvPr/>
+        </p:nvSpPr>
+        <p:spPr>
+          <a:xfrm>
+            <a:off x="2843784" y="2500884"/>
+            <a:ext cx="2569463" cy="402336"/>
+          </a:xfrm>
+          <a:prstGeom prst="rect">
+            <a:avLst/>
+          </a:prstGeom>
+          <a:noFill/>
+        </p:spPr>
+        <p:txBody>
+          <a:bodyPr wrap="square" lIns="0" rIns="0" tIns="0" bIns="0" anchor="t">
+            <a:spAutoFit/>
+          </a:bodyPr>
+          <a:lstStyle/>
+          <a:p>
+            <a:pPr algn="l">
+              <a:lnSpc>
+                <a:spcPct val="100000"/>
+              </a:lnSpc>
+            </a:pPr>
+            <a:r>
+              <a:rPr sz="1100" b="1" i="0">
+                <a:solidFill>
+                  <a:srgbClr val="FFFFFF"/>
+                </a:solidFill>
+                <a:latin typeface="Arial"/>
+              </a:rPr>
+              <a:t>Задача</a:t>
+            </a:r>
+          </a:p>
+        </p:txBody>
+      </p:sp>
+      <p:sp>
+        <p:nvSpPr>
+          <p:cNvPr id="13" name="TextBox 12"/>
+          <p:cNvSpPr txBox="1"/>
+          <p:nvPr/>
+        </p:nvSpPr>
+        <p:spPr>
+          <a:xfrm>
+            <a:off x="5632703" y="2500884"/>
+            <a:ext cx="786384" cy="402336"/>
+          </a:xfrm>
+          <a:prstGeom prst="rect">
+            <a:avLst/>
+          </a:prstGeom>
+          <a:noFill/>
+        </p:spPr>
+        <p:txBody>
+          <a:bodyPr wrap="square" lIns="0" rIns="0" tIns="0" bIns="0" anchor="t">
+            <a:spAutoFit/>
+          </a:bodyPr>
+          <a:lstStyle/>
+          <a:p>
+            <a:pPr algn="ctr">
+              <a:lnSpc>
+                <a:spcPct val="100000"/>
+              </a:lnSpc>
+            </a:pPr>
+            <a:r>
+              <a:rPr sz="1100" b="1" i="0">
+                <a:solidFill>
+                  <a:srgbClr val="FFFFFF"/>
+                </a:solidFill>
+                <a:latin typeface="Arial"/>
+              </a:rPr>
+              <a:t>Мест</a:t>
+            </a:r>
+          </a:p>
+        </p:txBody>
+      </p:sp>
+      <p:sp>
+        <p:nvSpPr>
+          <p:cNvPr id="14" name="TextBox 13"/>
+          <p:cNvSpPr txBox="1"/>
+          <p:nvPr/>
+        </p:nvSpPr>
+        <p:spPr>
+          <a:xfrm>
+            <a:off x="694944" y="2903220"/>
+            <a:ext cx="1929384" cy="402336"/>
+          </a:xfrm>
+          <a:prstGeom prst="rect">
+            <a:avLst/>
+          </a:prstGeom>
+          <a:noFill/>
+        </p:spPr>
+        <p:txBody>
+          <a:bodyPr wrap="square" lIns="0" rIns="0" tIns="0" bIns="0" anchor="t">
+            <a:spAutoFit/>
+          </a:bodyPr>
+          <a:lstStyle/>
+          <a:p>
+            <a:pPr algn="l">
+              <a:lnSpc>
+                <a:spcPct val="100000"/>
+              </a:lnSpc>
+            </a:pPr>
+            <a:r>
+              <a:rPr sz="1100" b="0" i="0">
+                <a:solidFill>
+                  <a:srgbClr val="1F1F1F"/>
+                </a:solidFill>
+                <a:latin typeface="Arial"/>
+              </a:rPr>
+              <a:t>Главный инженер</a:t>
+            </a:r>
+          </a:p>
+        </p:txBody>
+      </p:sp>
+      <p:sp>
+        <p:nvSpPr>
+          <p:cNvPr id="15" name="TextBox 14"/>
+          <p:cNvSpPr txBox="1"/>
+          <p:nvPr/>
+        </p:nvSpPr>
+        <p:spPr>
+          <a:xfrm>
+            <a:off x="2843784" y="2903220"/>
+            <a:ext cx="2569463" cy="402336"/>
+          </a:xfrm>
+          <a:prstGeom prst="rect">
+            <a:avLst/>
+          </a:prstGeom>
+          <a:noFill/>
+        </p:spPr>
+        <p:txBody>
+          <a:bodyPr wrap="square" lIns="0" rIns="0" tIns="0" bIns="0" anchor="t">
+            <a:spAutoFit/>
+          </a:bodyPr>
+          <a:lstStyle/>
+          <a:p>
+            <a:pPr algn="l">
+              <a:lnSpc>
+                <a:spcPct val="100000"/>
+              </a:lnSpc>
+            </a:pPr>
+            <a:r>
+              <a:rPr sz="1100" b="0" i="0">
+                <a:solidFill>
+                  <a:srgbClr val="1F1F1F"/>
+                </a:solidFill>
+                <a:latin typeface="Arial"/>
+              </a:rPr>
+              <a:t>Утверждение вентрежимов</a:t>
+            </a:r>
+          </a:p>
+        </p:txBody>
+      </p:sp>
+      <p:sp>
+        <p:nvSpPr>
+          <p:cNvPr id="16" name="TextBox 15"/>
+          <p:cNvSpPr txBox="1"/>
+          <p:nvPr/>
+        </p:nvSpPr>
+        <p:spPr>
+          <a:xfrm>
+            <a:off x="5632703" y="2903220"/>
+            <a:ext cx="786384" cy="402336"/>
+          </a:xfrm>
+          <a:prstGeom prst="rect">
+            <a:avLst/>
+          </a:prstGeom>
+          <a:noFill/>
+        </p:spPr>
+        <p:txBody>
+          <a:bodyPr wrap="square" lIns="0" rIns="0" tIns="0" bIns="0" anchor="t">
+            <a:spAutoFit/>
+          </a:bodyPr>
+          <a:lstStyle/>
+          <a:p>
+            <a:pPr algn="ctr">
+              <a:lnSpc>
+                <a:spcPct val="100000"/>
+              </a:lnSpc>
+            </a:pPr>
+            <a:r>
+              <a:rPr sz="1100" b="0" i="0">
+                <a:solidFill>
+                  <a:srgbClr val="1F1F1F"/>
+                </a:solidFill>
+                <a:latin typeface="Arial"/>
+              </a:rPr>
+              <a:t>1</a:t>
+            </a:r>
+          </a:p>
+        </p:txBody>
+      </p:sp>
+      <p:sp>
+        <p:nvSpPr>
+          <p:cNvPr id="17" name="Rectangle 16"/>
+          <p:cNvSpPr/>
+          <p:nvPr/>
+        </p:nvSpPr>
+        <p:spPr>
+          <a:xfrm>
+            <a:off x="566928" y="3227832"/>
+            <a:ext cx="5943600" cy="402336"/>
+          </a:xfrm>
+          <a:prstGeom prst="rect">
+            <a:avLst/>
+          </a:prstGeom>
+          <a:solidFill>
+            <a:srgbClr val="F5F5F5"/>
+          </a:solidFill>
+          <a:ln>
+            <a:noFill/>
+          </a:ln>
+          <a:effectLst/>
+        </p:spPr>
+        <p:style>
+          <a:lnRef idx="1">
+            <a:schemeClr val="accent1"/>
+          </a:lnRef>
+          <a:fillRef idx="3">
+            <a:schemeClr val="accent1"/>
+          </a:fillRef>
+          <a:effectRef idx="2">
+            <a:schemeClr val="accent1"/>
+          </a:effectRef>
+          <a:fontRef idx="minor">
+            <a:schemeClr val="lt1"/>
+          </a:fontRef>
+        </p:style>
+        <p:txBody>
+          <a:bodyPr rtlCol="0" anchor="ctr"/>
+          <a:lstStyle/>
+          <a:p>
+            <a:pPr algn="ctr"/>
+          </a:p>
+        </p:txBody>
+      </p:sp>
+      <p:sp>
+        <p:nvSpPr>
+          <p:cNvPr id="18" name="TextBox 17"/>
+          <p:cNvSpPr txBox="1"/>
+          <p:nvPr/>
+        </p:nvSpPr>
+        <p:spPr>
+          <a:xfrm>
+            <a:off x="694944" y="3305556"/>
+            <a:ext cx="1929384" cy="402336"/>
+          </a:xfrm>
+          <a:prstGeom prst="rect">
+            <a:avLst/>
+          </a:prstGeom>
+          <a:noFill/>
+        </p:spPr>
+        <p:txBody>
+          <a:bodyPr wrap="square" lIns="0" rIns="0" tIns="0" bIns="0" anchor="t">
+            <a:spAutoFit/>
+          </a:bodyPr>
+          <a:lstStyle/>
+          <a:p>
+            <a:pPr algn="l">
+              <a:lnSpc>
+                <a:spcPct val="100000"/>
+              </a:lnSpc>
+            </a:pPr>
+            <a:r>
+              <a:rPr sz="1100" b="0" i="0">
+                <a:solidFill>
+                  <a:srgbClr val="1F1F1F"/>
+                </a:solidFill>
+                <a:latin typeface="Arial"/>
+              </a:rPr>
+              <a:t>Участок ВТБ</a:t>
+            </a:r>
+          </a:p>
+        </p:txBody>
+      </p:sp>
+      <p:sp>
+        <p:nvSpPr>
+          <p:cNvPr id="19" name="TextBox 18"/>
+          <p:cNvSpPr txBox="1"/>
+          <p:nvPr/>
+        </p:nvSpPr>
+        <p:spPr>
+          <a:xfrm>
+            <a:off x="2843784" y="3305556"/>
+            <a:ext cx="2569463" cy="402336"/>
+          </a:xfrm>
+          <a:prstGeom prst="rect">
+            <a:avLst/>
+          </a:prstGeom>
+          <a:noFill/>
+        </p:spPr>
+        <p:txBody>
+          <a:bodyPr wrap="square" lIns="0" rIns="0" tIns="0" bIns="0" anchor="t">
+            <a:spAutoFit/>
+          </a:bodyPr>
+          <a:lstStyle/>
+          <a:p>
+            <a:pPr algn="l">
+              <a:lnSpc>
+                <a:spcPct val="100000"/>
+              </a:lnSpc>
+            </a:pPr>
+            <a:r>
+              <a:rPr sz="1100" b="0" i="0">
+                <a:solidFill>
+                  <a:srgbClr val="1F1F1F"/>
+                </a:solidFill>
+                <a:latin typeface="Arial"/>
+              </a:rPr>
+              <a:t>Вентиляция, депрессионная съёмка</a:t>
+            </a:r>
+          </a:p>
+        </p:txBody>
+      </p:sp>
+      <p:sp>
+        <p:nvSpPr>
+          <p:cNvPr id="20" name="TextBox 19"/>
+          <p:cNvSpPr txBox="1"/>
+          <p:nvPr/>
+        </p:nvSpPr>
+        <p:spPr>
+          <a:xfrm>
+            <a:off x="5632703" y="3305556"/>
+            <a:ext cx="786384" cy="402336"/>
+          </a:xfrm>
+          <a:prstGeom prst="rect">
+            <a:avLst/>
+          </a:prstGeom>
+          <a:noFill/>
+        </p:spPr>
+        <p:txBody>
+          <a:bodyPr wrap="square" lIns="0" rIns="0" tIns="0" bIns="0" anchor="t">
+            <a:spAutoFit/>
+          </a:bodyPr>
+          <a:lstStyle/>
+          <a:p>
+            <a:pPr algn="ctr">
+              <a:lnSpc>
+                <a:spcPct val="100000"/>
+              </a:lnSpc>
+            </a:pPr>
+            <a:r>
+              <a:rPr sz="1100" b="0" i="0">
+                <a:solidFill>
+                  <a:srgbClr val="1F1F1F"/>
+                </a:solidFill>
+                <a:latin typeface="Arial"/>
+              </a:rPr>
+              <a:t>2</a:t>
+            </a:r>
+          </a:p>
+        </p:txBody>
+      </p:sp>
+      <p:sp>
+        <p:nvSpPr>
+          <p:cNvPr id="21" name="TextBox 20"/>
+          <p:cNvSpPr txBox="1"/>
+          <p:nvPr/>
+        </p:nvSpPr>
+        <p:spPr>
+          <a:xfrm>
+            <a:off x="694944" y="3707891"/>
+            <a:ext cx="1929384" cy="402336"/>
+          </a:xfrm>
+          <a:prstGeom prst="rect">
+            <a:avLst/>
+          </a:prstGeom>
+          <a:noFill/>
+        </p:spPr>
+        <p:txBody>
+          <a:bodyPr wrap="square" lIns="0" rIns="0" tIns="0" bIns="0" anchor="t">
+            <a:spAutoFit/>
+          </a:bodyPr>
+          <a:lstStyle/>
+          <a:p>
+            <a:pPr algn="l">
+              <a:lnSpc>
+                <a:spcPct val="100000"/>
+              </a:lnSpc>
+            </a:pPr>
+            <a:r>
+              <a:rPr sz="1100" b="0" i="0">
+                <a:solidFill>
+                  <a:srgbClr val="1F1F1F"/>
+                </a:solidFill>
+                <a:latin typeface="Arial"/>
+              </a:rPr>
+              <a:t>Инженер-проектировщик</a:t>
+            </a:r>
+          </a:p>
+        </p:txBody>
+      </p:sp>
+      <p:sp>
+        <p:nvSpPr>
+          <p:cNvPr id="22" name="TextBox 21"/>
+          <p:cNvSpPr txBox="1"/>
+          <p:nvPr/>
+        </p:nvSpPr>
+        <p:spPr>
+          <a:xfrm>
+            <a:off x="2843784" y="3707891"/>
+            <a:ext cx="2569463" cy="402336"/>
+          </a:xfrm>
+          <a:prstGeom prst="rect">
+            <a:avLst/>
+          </a:prstGeom>
+          <a:noFill/>
+        </p:spPr>
+        <p:txBody>
+          <a:bodyPr wrap="square" lIns="0" rIns="0" tIns="0" bIns="0" anchor="t">
+            <a:spAutoFit/>
+          </a:bodyPr>
+          <a:lstStyle/>
+          <a:p>
+            <a:pPr algn="l">
+              <a:lnSpc>
+                <a:spcPct val="100000"/>
+              </a:lnSpc>
+            </a:pPr>
+            <a:r>
+              <a:rPr sz="1100" b="0" i="0">
+                <a:solidFill>
+                  <a:srgbClr val="1F1F1F"/>
+                </a:solidFill>
+                <a:latin typeface="Arial"/>
+              </a:rPr>
+              <a:t>Проекты, расчёт воздуха</a:t>
+            </a:r>
+          </a:p>
+        </p:txBody>
+      </p:sp>
+      <p:sp>
+        <p:nvSpPr>
+          <p:cNvPr id="23" name="TextBox 22"/>
+          <p:cNvSpPr txBox="1"/>
+          <p:nvPr/>
+        </p:nvSpPr>
+        <p:spPr>
+          <a:xfrm>
+            <a:off x="5632703" y="3707891"/>
+            <a:ext cx="786384" cy="402336"/>
+          </a:xfrm>
+          <a:prstGeom prst="rect">
+            <a:avLst/>
+          </a:prstGeom>
+          <a:noFill/>
+        </p:spPr>
+        <p:txBody>
+          <a:bodyPr wrap="square" lIns="0" rIns="0" tIns="0" bIns="0" anchor="t">
+            <a:spAutoFit/>
+          </a:bodyPr>
+          <a:lstStyle/>
+          <a:p>
+            <a:pPr algn="ctr">
+              <a:lnSpc>
+                <a:spcPct val="100000"/>
+              </a:lnSpc>
+            </a:pPr>
+            <a:r>
+              <a:rPr sz="1100" b="0" i="0">
+                <a:solidFill>
+                  <a:srgbClr val="1F1F1F"/>
+                </a:solidFill>
+                <a:latin typeface="Arial"/>
+              </a:rPr>
+              <a:t>1</a:t>
+            </a:r>
+          </a:p>
+        </p:txBody>
+      </p:sp>
+      <p:sp>
+        <p:nvSpPr>
+          <p:cNvPr id="24" name="Rectangle 23"/>
+          <p:cNvSpPr/>
+          <p:nvPr/>
+        </p:nvSpPr>
+        <p:spPr>
+          <a:xfrm>
+            <a:off x="566928" y="4032504"/>
+            <a:ext cx="5943600" cy="402336"/>
+          </a:xfrm>
+          <a:prstGeom prst="rect">
+            <a:avLst/>
+          </a:prstGeom>
+          <a:solidFill>
+            <a:srgbClr val="F5F5F5"/>
+          </a:solidFill>
+          <a:ln>
+            <a:noFill/>
+          </a:ln>
+          <a:effectLst/>
+        </p:spPr>
+        <p:style>
+          <a:lnRef idx="1">
+            <a:schemeClr val="accent1"/>
+          </a:lnRef>
+          <a:fillRef idx="3">
+            <a:schemeClr val="accent1"/>
+          </a:fillRef>
+          <a:effectRef idx="2">
+            <a:schemeClr val="accent1"/>
+          </a:effectRef>
+          <a:fontRef idx="minor">
+            <a:schemeClr val="lt1"/>
+          </a:fontRef>
+        </p:style>
+        <p:txBody>
+          <a:bodyPr rtlCol="0" anchor="ctr"/>
+          <a:lstStyle/>
+          <a:p>
+            <a:pPr algn="ctr"/>
+          </a:p>
+        </p:txBody>
+      </p:sp>
+      <p:sp>
+        <p:nvSpPr>
+          <p:cNvPr id="25" name="TextBox 24"/>
+          <p:cNvSpPr txBox="1"/>
+          <p:nvPr/>
+        </p:nvSpPr>
+        <p:spPr>
+          <a:xfrm>
+            <a:off x="694944" y="4110228"/>
+            <a:ext cx="1929384" cy="402336"/>
+          </a:xfrm>
+          <a:prstGeom prst="rect">
+            <a:avLst/>
+          </a:prstGeom>
+          <a:noFill/>
+        </p:spPr>
+        <p:txBody>
+          <a:bodyPr wrap="square" lIns="0" rIns="0" tIns="0" bIns="0" anchor="t">
+            <a:spAutoFit/>
+          </a:bodyPr>
+          <a:lstStyle/>
+          <a:p>
+            <a:pPr algn="l">
+              <a:lnSpc>
+                <a:spcPct val="100000"/>
+              </a:lnSpc>
+            </a:pPr>
+            <a:r>
+              <a:rPr sz="1100" b="0" i="0">
+                <a:solidFill>
+                  <a:srgbClr val="1F1F1F"/>
+                </a:solidFill>
+                <a:latin typeface="Arial"/>
+              </a:rPr>
+              <a:t>Специалист по ПЛА</a:t>
+            </a:r>
+          </a:p>
+        </p:txBody>
+      </p:sp>
+      <p:sp>
+        <p:nvSpPr>
+          <p:cNvPr id="26" name="TextBox 25"/>
+          <p:cNvSpPr txBox="1"/>
+          <p:nvPr/>
+        </p:nvSpPr>
+        <p:spPr>
+          <a:xfrm>
+            <a:off x="2843784" y="4110228"/>
+            <a:ext cx="2569463" cy="402336"/>
+          </a:xfrm>
+          <a:prstGeom prst="rect">
+            <a:avLst/>
+          </a:prstGeom>
+          <a:noFill/>
+        </p:spPr>
+        <p:txBody>
+          <a:bodyPr wrap="square" lIns="0" rIns="0" tIns="0" bIns="0" anchor="t">
+            <a:spAutoFit/>
+          </a:bodyPr>
+          <a:lstStyle/>
+          <a:p>
+            <a:pPr algn="l">
+              <a:lnSpc>
+                <a:spcPct val="100000"/>
+              </a:lnSpc>
+            </a:pPr>
+            <a:r>
+              <a:rPr sz="1100" b="0" i="0">
+                <a:solidFill>
+                  <a:srgbClr val="1F1F1F"/>
+                </a:solidFill>
+                <a:latin typeface="Arial"/>
+              </a:rPr>
+              <a:t>Аварийные режимы, позиции</a:t>
+            </a:r>
+          </a:p>
+        </p:txBody>
+      </p:sp>
+      <p:sp>
+        <p:nvSpPr>
+          <p:cNvPr id="27" name="TextBox 26"/>
+          <p:cNvSpPr txBox="1"/>
+          <p:nvPr/>
+        </p:nvSpPr>
+        <p:spPr>
+          <a:xfrm>
+            <a:off x="5632703" y="4110228"/>
+            <a:ext cx="786384" cy="402336"/>
+          </a:xfrm>
+          <a:prstGeom prst="rect">
+            <a:avLst/>
+          </a:prstGeom>
+          <a:noFill/>
+        </p:spPr>
+        <p:txBody>
+          <a:bodyPr wrap="square" lIns="0" rIns="0" tIns="0" bIns="0" anchor="t">
+            <a:spAutoFit/>
+          </a:bodyPr>
+          <a:lstStyle/>
+          <a:p>
+            <a:pPr algn="ctr">
+              <a:lnSpc>
+                <a:spcPct val="100000"/>
+              </a:lnSpc>
+            </a:pPr>
+            <a:r>
+              <a:rPr sz="1100" b="0" i="0">
+                <a:solidFill>
+                  <a:srgbClr val="1F1F1F"/>
+                </a:solidFill>
+                <a:latin typeface="Arial"/>
+              </a:rPr>
+              <a:t>1</a:t>
+            </a:r>
+          </a:p>
+        </p:txBody>
+      </p:sp>
+      <p:sp>
+        <p:nvSpPr>
+          <p:cNvPr id="28" name="Rectangle 27"/>
+          <p:cNvSpPr/>
+          <p:nvPr/>
+        </p:nvSpPr>
+        <p:spPr>
+          <a:xfrm>
+            <a:off x="566928" y="4434840"/>
+            <a:ext cx="5943600" cy="402336"/>
+          </a:xfrm>
+          <a:prstGeom prst="rect">
+            <a:avLst/>
+          </a:prstGeom>
+          <a:solidFill>
+            <a:srgbClr val="ECF7F0"/>
+          </a:solidFill>
+          <a:ln>
+            <a:noFill/>
+          </a:ln>
+          <a:effectLst/>
+        </p:spPr>
+        <p:style>
+          <a:lnRef idx="1">
+            <a:schemeClr val="accent1"/>
+          </a:lnRef>
+          <a:fillRef idx="3">
+            <a:schemeClr val="accent1"/>
+          </a:fillRef>
+          <a:effectRef idx="2">
+            <a:schemeClr val="accent1"/>
+          </a:effectRef>
+          <a:fontRef idx="minor">
+            <a:schemeClr val="lt1"/>
+          </a:fontRef>
+        </p:style>
+        <p:txBody>
+          <a:bodyPr rtlCol="0" anchor="ctr"/>
+          <a:lstStyle/>
+          <a:p>
+            <a:pPr algn="ctr"/>
+          </a:p>
+        </p:txBody>
+      </p:sp>
+      <p:sp>
+        <p:nvSpPr>
+          <p:cNvPr id="29" name="TextBox 28"/>
+          <p:cNvSpPr txBox="1"/>
+          <p:nvPr/>
+        </p:nvSpPr>
+        <p:spPr>
+          <a:xfrm>
+            <a:off x="694944" y="4512564"/>
+            <a:ext cx="1929384" cy="402336"/>
+          </a:xfrm>
+          <a:prstGeom prst="rect">
+            <a:avLst/>
+          </a:prstGeom>
+          <a:noFill/>
+        </p:spPr>
+        <p:txBody>
+          <a:bodyPr wrap="square" lIns="0" rIns="0" tIns="0" bIns="0" anchor="t">
+            <a:spAutoFit/>
+          </a:bodyPr>
+          <a:lstStyle/>
+          <a:p>
+            <a:pPr algn="l">
+              <a:lnSpc>
+                <a:spcPct val="100000"/>
+              </a:lnSpc>
+            </a:pPr>
+            <a:r>
+              <a:rPr sz="1100" b="1" i="0">
+                <a:solidFill>
+                  <a:srgbClr val="15803D"/>
+                </a:solidFill>
+                <a:latin typeface="Arial"/>
+              </a:rPr>
+              <a:t>Итого на рудник</a:t>
+            </a:r>
+          </a:p>
+        </p:txBody>
+      </p:sp>
+      <p:sp>
+        <p:nvSpPr>
+          <p:cNvPr id="30" name="TextBox 29"/>
+          <p:cNvSpPr txBox="1"/>
+          <p:nvPr/>
+        </p:nvSpPr>
+        <p:spPr>
+          <a:xfrm>
+            <a:off x="2843784" y="4512564"/>
+            <a:ext cx="2569463" cy="402336"/>
+          </a:xfrm>
+          <a:prstGeom prst="rect">
+            <a:avLst/>
+          </a:prstGeom>
+          <a:noFill/>
+        </p:spPr>
+        <p:txBody>
+          <a:bodyPr wrap="square" lIns="0" rIns="0" tIns="0" bIns="0" anchor="t">
+            <a:spAutoFit/>
+          </a:bodyPr>
+          <a:lstStyle/>
+          <a:p>
+            <a:pPr algn="l">
+              <a:lnSpc>
+                <a:spcPct val="100000"/>
+              </a:lnSpc>
+            </a:pPr>
+            <a:r>
+              <a:rPr sz="1100" b="1" i="0">
+                <a:solidFill>
+                  <a:srgbClr val="15803D"/>
+                </a:solidFill>
+                <a:latin typeface="Arial"/>
+              </a:rPr>
+              <a:t/>
+            </a:r>
+          </a:p>
+        </p:txBody>
+      </p:sp>
+      <p:sp>
+        <p:nvSpPr>
+          <p:cNvPr id="31" name="TextBox 30"/>
+          <p:cNvSpPr txBox="1"/>
+          <p:nvPr/>
+        </p:nvSpPr>
+        <p:spPr>
+          <a:xfrm>
+            <a:off x="5632703" y="4512564"/>
+            <a:ext cx="786384" cy="402336"/>
+          </a:xfrm>
+          <a:prstGeom prst="rect">
+            <a:avLst/>
+          </a:prstGeom>
+          <a:noFill/>
+        </p:spPr>
+        <p:txBody>
+          <a:bodyPr wrap="square" lIns="0" rIns="0" tIns="0" bIns="0" anchor="t">
+            <a:spAutoFit/>
+          </a:bodyPr>
+          <a:lstStyle/>
+          <a:p>
+            <a:pPr algn="ctr">
+              <a:lnSpc>
+                <a:spcPct val="100000"/>
+              </a:lnSpc>
+            </a:pPr>
+            <a:r>
+              <a:rPr sz="1100" b="1" i="0">
+                <a:solidFill>
+                  <a:srgbClr val="15803D"/>
+                </a:solidFill>
+                <a:latin typeface="Arial"/>
+              </a:rPr>
+              <a:t>5</a:t>
+            </a:r>
+          </a:p>
+        </p:txBody>
+      </p:sp>
+      <p:sp>
+        <p:nvSpPr>
+          <p:cNvPr id="32" name="Rectangle 31"/>
+          <p:cNvSpPr/>
+          <p:nvPr/>
+        </p:nvSpPr>
+        <p:spPr>
+          <a:xfrm>
+            <a:off x="6812280" y="2011680"/>
+            <a:ext cx="4818888" cy="1371600"/>
+          </a:xfrm>
+          <a:prstGeom prst="rect">
+            <a:avLst/>
+          </a:prstGeom>
+          <a:solidFill>
+            <a:srgbClr val="FFFFFF"/>
+          </a:solidFill>
+          <a:ln w="13970">
+            <a:solidFill>
+              <a:srgbClr val="E8E8E8"/>
+            </a:solidFill>
+          </a:ln>
+          <a:effectLst/>
+        </p:spPr>
+        <p:style>
+          <a:lnRef idx="1">
+            <a:schemeClr val="accent1"/>
+          </a:lnRef>
+          <a:fillRef idx="3">
+            <a:schemeClr val="accent1"/>
+          </a:fillRef>
+          <a:effectRef idx="2">
+            <a:schemeClr val="accent1"/>
+          </a:effectRef>
+          <a:fontRef idx="minor">
+            <a:schemeClr val="lt1"/>
+          </a:fontRef>
+        </p:style>
+        <p:txBody>
+          <a:bodyPr rtlCol="0" anchor="ctr"/>
+          <a:lstStyle/>
+          <a:p>
+            <a:pPr algn="ctr"/>
+          </a:p>
+        </p:txBody>
+      </p:sp>
+      <p:sp>
+        <p:nvSpPr>
+          <p:cNvPr id="33" name="Rectangle 32"/>
+          <p:cNvSpPr/>
+          <p:nvPr/>
+        </p:nvSpPr>
+        <p:spPr>
+          <a:xfrm>
+            <a:off x="6812280" y="2011680"/>
+            <a:ext cx="68580" cy="1371600"/>
+          </a:xfrm>
+          <a:prstGeom prst="rect">
+            <a:avLst/>
+          </a:prstGeom>
+          <a:solidFill>
+            <a:srgbClr val="15803D"/>
+          </a:solidFill>
+          <a:ln>
+            <a:noFill/>
+          </a:ln>
+          <a:effectLst/>
+        </p:spPr>
+        <p:style>
+          <a:lnRef idx="1">
+            <a:schemeClr val="accent1"/>
+          </a:lnRef>
+          <a:fillRef idx="3">
+            <a:schemeClr val="accent1"/>
+          </a:fillRef>
+          <a:effectRef idx="2">
+            <a:schemeClr val="accent1"/>
+          </a:effectRef>
+          <a:fontRef idx="minor">
+            <a:schemeClr val="lt1"/>
+          </a:fontRef>
+        </p:style>
+        <p:txBody>
+          <a:bodyPr rtlCol="0" anchor="ctr"/>
+          <a:lstStyle/>
+          <a:p>
+            <a:pPr algn="ctr"/>
+          </a:p>
+        </p:txBody>
+      </p:sp>
+      <p:sp>
+        <p:nvSpPr>
+          <p:cNvPr id="34" name="TextBox 33"/>
+          <p:cNvSpPr txBox="1"/>
+          <p:nvPr/>
+        </p:nvSpPr>
+        <p:spPr>
+          <a:xfrm>
+            <a:off x="7104888" y="2185416"/>
+            <a:ext cx="4315968" cy="310896"/>
+          </a:xfrm>
+          <a:prstGeom prst="rect">
+            <a:avLst/>
+          </a:prstGeom>
+          <a:noFill/>
+        </p:spPr>
+        <p:txBody>
+          <a:bodyPr wrap="square" lIns="0" rIns="0" tIns="0" bIns="0" anchor="t">
+            <a:spAutoFit/>
+          </a:bodyPr>
+          <a:lstStyle/>
+          <a:p>
+            <a:pPr algn="l">
+              <a:lnSpc>
+                <a:spcPct val="100000"/>
+              </a:lnSpc>
+            </a:pPr>
+            <a:r>
+              <a:rPr sz="1400" b="1" i="0">
+                <a:solidFill>
+                  <a:srgbClr val="1A3A6B"/>
+                </a:solidFill>
+                <a:latin typeface="Arial"/>
+              </a:rPr>
+              <a:t>Базовый пакет — ровно на рудник</a:t>
+            </a:r>
+          </a:p>
+        </p:txBody>
+      </p:sp>
+      <p:sp>
+        <p:nvSpPr>
+          <p:cNvPr id="35" name="TextBox 34"/>
+          <p:cNvSpPr txBox="1"/>
+          <p:nvPr/>
+        </p:nvSpPr>
+        <p:spPr>
+          <a:xfrm>
+            <a:off x="7104888" y="2569464"/>
+            <a:ext cx="4315968" cy="685800"/>
+          </a:xfrm>
+          <a:prstGeom prst="rect">
+            <a:avLst/>
+          </a:prstGeom>
+          <a:noFill/>
+        </p:spPr>
+        <p:txBody>
+          <a:bodyPr wrap="square" lIns="0" rIns="0" tIns="0" bIns="0" anchor="t">
+            <a:spAutoFit/>
+          </a:bodyPr>
+          <a:lstStyle/>
+          <a:p>
+            <a:pPr algn="l">
+              <a:lnSpc>
+                <a:spcPct val="116000"/>
+              </a:lnSpc>
+            </a:pPr>
+            <a:r>
+              <a:rPr sz="1100" b="0" i="0">
+                <a:solidFill>
+                  <a:srgbClr val="5A6372"/>
+                </a:solidFill>
+                <a:latin typeface="Arial"/>
+              </a:rPr>
+              <a:t>Один ключ рассчитан на 5 рабочих мест.</a:t>
+            </a:r>
+          </a:p>
+          <a:p>
+            <a:pPr algn="l">
+              <a:lnSpc>
+                <a:spcPct val="116000"/>
+              </a:lnSpc>
+            </a:pPr>
+            <a:r>
+              <a:rPr sz="1100" b="0" i="0">
+                <a:solidFill>
+                  <a:srgbClr val="5A6372"/>
+                </a:solidFill>
+                <a:latin typeface="Arial"/>
+              </a:rPr>
+              <a:t>Это как раз закрывает вентиляционную</a:t>
+            </a:r>
+          </a:p>
+          <a:p>
+            <a:pPr algn="l">
+              <a:lnSpc>
+                <a:spcPct val="116000"/>
+              </a:lnSpc>
+            </a:pPr>
+            <a:r>
+              <a:rPr sz="1100" b="0" i="0">
+                <a:solidFill>
+                  <a:srgbClr val="5A6372"/>
+                </a:solidFill>
+                <a:latin typeface="Arial"/>
+              </a:rPr>
+              <a:t>службу одного предприятия.</a:t>
+            </a:r>
+          </a:p>
+        </p:txBody>
+      </p:sp>
+      <p:sp>
+        <p:nvSpPr>
+          <p:cNvPr id="36" name="Rectangle 35"/>
+          <p:cNvSpPr/>
+          <p:nvPr/>
+        </p:nvSpPr>
+        <p:spPr>
+          <a:xfrm>
+            <a:off x="6812280" y="3520440"/>
+            <a:ext cx="4818888" cy="1371600"/>
+          </a:xfrm>
+          <a:prstGeom prst="rect">
+            <a:avLst/>
+          </a:prstGeom>
+          <a:solidFill>
+            <a:srgbClr val="FFFFFF"/>
+          </a:solidFill>
+          <a:ln w="13970">
+            <a:solidFill>
+              <a:srgbClr val="E8E8E8"/>
+            </a:solidFill>
+          </a:ln>
+          <a:effectLst/>
+        </p:spPr>
+        <p:style>
+          <a:lnRef idx="1">
+            <a:schemeClr val="accent1"/>
+          </a:lnRef>
+          <a:fillRef idx="3">
+            <a:schemeClr val="accent1"/>
+          </a:fillRef>
+          <a:effectRef idx="2">
+            <a:schemeClr val="accent1"/>
+          </a:effectRef>
+          <a:fontRef idx="minor">
+            <a:schemeClr val="lt1"/>
+          </a:fontRef>
+        </p:style>
+        <p:txBody>
+          <a:bodyPr rtlCol="0" anchor="ctr"/>
+          <a:lstStyle/>
+          <a:p>
+            <a:pPr algn="ctr"/>
+          </a:p>
+        </p:txBody>
+      </p:sp>
+      <p:sp>
+        <p:nvSpPr>
+          <p:cNvPr id="37" name="Rectangle 36"/>
+          <p:cNvSpPr/>
+          <p:nvPr/>
+        </p:nvSpPr>
+        <p:spPr>
+          <a:xfrm>
+            <a:off x="6812280" y="3520440"/>
+            <a:ext cx="68580" cy="1371600"/>
+          </a:xfrm>
+          <a:prstGeom prst="rect">
+            <a:avLst/>
+          </a:prstGeom>
+          <a:solidFill>
+            <a:srgbClr val="B91C1C"/>
+          </a:solidFill>
+          <a:ln>
+            <a:noFill/>
+          </a:ln>
+          <a:effectLst/>
+        </p:spPr>
+        <p:style>
+          <a:lnRef idx="1">
+            <a:schemeClr val="accent1"/>
+          </a:lnRef>
+          <a:fillRef idx="3">
+            <a:schemeClr val="accent1"/>
+          </a:fillRef>
+          <a:effectRef idx="2">
+            <a:schemeClr val="accent1"/>
+          </a:effectRef>
+          <a:fontRef idx="minor">
+            <a:schemeClr val="lt1"/>
+          </a:fontRef>
+        </p:style>
+        <p:txBody>
+          <a:bodyPr rtlCol="0" anchor="ctr"/>
+          <a:lstStyle/>
+          <a:p>
+            <a:pPr algn="ctr"/>
+          </a:p>
+        </p:txBody>
+      </p:sp>
+      <p:sp>
+        <p:nvSpPr>
+          <p:cNvPr id="38" name="TextBox 37"/>
+          <p:cNvSpPr txBox="1"/>
+          <p:nvPr/>
+        </p:nvSpPr>
+        <p:spPr>
+          <a:xfrm>
+            <a:off x="7104888" y="3694176"/>
+            <a:ext cx="4315968" cy="310896"/>
+          </a:xfrm>
+          <a:prstGeom prst="rect">
+            <a:avLst/>
+          </a:prstGeom>
+          <a:noFill/>
+        </p:spPr>
+        <p:txBody>
+          <a:bodyPr wrap="square" lIns="0" rIns="0" tIns="0" bIns="0" anchor="t">
+            <a:spAutoFit/>
+          </a:bodyPr>
+          <a:lstStyle/>
+          <a:p>
+            <a:pPr algn="l">
+              <a:lnSpc>
+                <a:spcPct val="100000"/>
+              </a:lnSpc>
+            </a:pPr>
+            <a:r>
+              <a:rPr sz="1400" b="1" i="0">
+                <a:solidFill>
+                  <a:srgbClr val="1A3A6B"/>
+                </a:solidFill>
+                <a:latin typeface="Arial"/>
+              </a:rPr>
+              <a:t>ВГСЧ считается отдельно</a:t>
+            </a:r>
+          </a:p>
+        </p:txBody>
+      </p:sp>
+      <p:sp>
+        <p:nvSpPr>
+          <p:cNvPr id="39" name="TextBox 38"/>
+          <p:cNvSpPr txBox="1"/>
+          <p:nvPr/>
+        </p:nvSpPr>
+        <p:spPr>
+          <a:xfrm>
+            <a:off x="7104888" y="4078224"/>
+            <a:ext cx="4315968" cy="685800"/>
+          </a:xfrm>
+          <a:prstGeom prst="rect">
+            <a:avLst/>
+          </a:prstGeom>
+          <a:noFill/>
+        </p:spPr>
+        <p:txBody>
+          <a:bodyPr wrap="square" lIns="0" rIns="0" tIns="0" bIns="0" anchor="t">
+            <a:spAutoFit/>
+          </a:bodyPr>
+          <a:lstStyle/>
+          <a:p>
+            <a:pPr algn="l">
+              <a:lnSpc>
+                <a:spcPct val="116000"/>
+              </a:lnSpc>
+            </a:pPr>
+            <a:r>
+              <a:rPr sz="1100" b="0" i="0">
+                <a:solidFill>
+                  <a:srgbClr val="5A6372"/>
+                </a:solidFill>
+                <a:latin typeface="Arial"/>
+              </a:rPr>
+              <a:t>Отряду обычно достаточно 2–3 мест:</a:t>
+            </a:r>
+          </a:p>
+          <a:p>
+            <a:pPr algn="l">
+              <a:lnSpc>
+                <a:spcPct val="116000"/>
+              </a:lnSpc>
+            </a:pPr>
+            <a:r>
+              <a:rPr sz="1100" b="0" i="0">
+                <a:solidFill>
+                  <a:srgbClr val="5A6372"/>
+                </a:solidFill>
+                <a:latin typeface="Arial"/>
+              </a:rPr>
+              <a:t>командир и расчётчики маршрутов.</a:t>
+            </a:r>
+          </a:p>
+          <a:p>
+            <a:pPr algn="l">
+              <a:lnSpc>
+                <a:spcPct val="116000"/>
+              </a:lnSpc>
+            </a:pPr>
+            <a:r>
+              <a:rPr sz="1100" b="0" i="0">
+                <a:solidFill>
+                  <a:srgbClr val="5A6372"/>
+                </a:solidFill>
+                <a:latin typeface="Arial"/>
+              </a:rPr>
+              <a:t>Входит в общий ключ группы.</a:t>
+            </a:r>
+          </a:p>
+        </p:txBody>
+      </p:sp>
+      <p:sp>
+        <p:nvSpPr>
+          <p:cNvPr id="40" name="Rectangle 39"/>
+          <p:cNvSpPr/>
+          <p:nvPr/>
+        </p:nvSpPr>
+        <p:spPr>
+          <a:xfrm>
+            <a:off x="6812280" y="5029200"/>
+            <a:ext cx="4818888" cy="1234440"/>
+          </a:xfrm>
+          <a:prstGeom prst="rect">
+            <a:avLst/>
+          </a:prstGeom>
+          <a:solidFill>
+            <a:srgbClr val="FFFFFF"/>
+          </a:solidFill>
+          <a:ln w="13970">
+            <a:solidFill>
+              <a:srgbClr val="E8E8E8"/>
+            </a:solidFill>
+          </a:ln>
+          <a:effectLst/>
+        </p:spPr>
+        <p:style>
+          <a:lnRef idx="1">
+            <a:schemeClr val="accent1"/>
+          </a:lnRef>
+          <a:fillRef idx="3">
+            <a:schemeClr val="accent1"/>
+          </a:fillRef>
+          <a:effectRef idx="2">
+            <a:schemeClr val="accent1"/>
+          </a:effectRef>
+          <a:fontRef idx="minor">
+            <a:schemeClr val="lt1"/>
+          </a:fontRef>
+        </p:style>
+        <p:txBody>
+          <a:bodyPr rtlCol="0" anchor="ctr"/>
+          <a:lstStyle/>
+          <a:p>
+            <a:pPr algn="ctr"/>
+          </a:p>
+        </p:txBody>
+      </p:sp>
+      <p:sp>
+        <p:nvSpPr>
+          <p:cNvPr id="41" name="Rectangle 40"/>
+          <p:cNvSpPr/>
+          <p:nvPr/>
+        </p:nvSpPr>
+        <p:spPr>
+          <a:xfrm>
+            <a:off x="6812280" y="5029200"/>
+            <a:ext cx="68580" cy="1234440"/>
+          </a:xfrm>
+          <a:prstGeom prst="rect">
+            <a:avLst/>
+          </a:prstGeom>
+          <a:solidFill>
+            <a:srgbClr val="1A3A6B"/>
+          </a:solidFill>
+          <a:ln>
+            <a:noFill/>
+          </a:ln>
+          <a:effectLst/>
+        </p:spPr>
+        <p:style>
+          <a:lnRef idx="1">
+            <a:schemeClr val="accent1"/>
+          </a:lnRef>
+          <a:fillRef idx="3">
+            <a:schemeClr val="accent1"/>
+          </a:fillRef>
+          <a:effectRef idx="2">
+            <a:schemeClr val="accent1"/>
+          </a:effectRef>
+          <a:fontRef idx="minor">
+            <a:schemeClr val="lt1"/>
+          </a:fontRef>
+        </p:style>
+        <p:txBody>
+          <a:bodyPr rtlCol="0" anchor="ctr"/>
+          <a:lstStyle/>
+          <a:p>
+            <a:pPr algn="ctr"/>
+          </a:p>
+        </p:txBody>
+      </p:sp>
+      <p:sp>
+        <p:nvSpPr>
+          <p:cNvPr id="42" name="TextBox 41"/>
+          <p:cNvSpPr txBox="1"/>
+          <p:nvPr/>
+        </p:nvSpPr>
+        <p:spPr>
+          <a:xfrm>
+            <a:off x="7104888" y="5202936"/>
+            <a:ext cx="4315968" cy="310896"/>
+          </a:xfrm>
+          <a:prstGeom prst="rect">
+            <a:avLst/>
+          </a:prstGeom>
+          <a:noFill/>
+        </p:spPr>
+        <p:txBody>
+          <a:bodyPr wrap="square" lIns="0" rIns="0" tIns="0" bIns="0" anchor="t">
+            <a:spAutoFit/>
+          </a:bodyPr>
+          <a:lstStyle/>
+          <a:p>
+            <a:pPr algn="l">
+              <a:lnSpc>
+                <a:spcPct val="100000"/>
+              </a:lnSpc>
+            </a:pPr>
+            <a:r>
+              <a:rPr sz="1400" b="1" i="0">
+                <a:solidFill>
+                  <a:srgbClr val="1A3A6B"/>
+                </a:solidFill>
+                <a:latin typeface="Arial"/>
+              </a:rPr>
+              <a:t>Управляющая компания</a:t>
+            </a:r>
+          </a:p>
+        </p:txBody>
+      </p:sp>
+      <p:sp>
+        <p:nvSpPr>
+          <p:cNvPr id="43" name="TextBox 42"/>
+          <p:cNvSpPr txBox="1"/>
+          <p:nvPr/>
+        </p:nvSpPr>
+        <p:spPr>
+          <a:xfrm>
+            <a:off x="7104888" y="5586984"/>
+            <a:ext cx="4315968" cy="548640"/>
+          </a:xfrm>
+          <a:prstGeom prst="rect">
+            <a:avLst/>
+          </a:prstGeom>
+          <a:noFill/>
+        </p:spPr>
+        <p:txBody>
+          <a:bodyPr wrap="square" lIns="0" rIns="0" tIns="0" bIns="0" anchor="t">
+            <a:spAutoFit/>
+          </a:bodyPr>
+          <a:lstStyle/>
+          <a:p>
+            <a:pPr algn="l">
+              <a:lnSpc>
+                <a:spcPct val="116000"/>
+              </a:lnSpc>
+            </a:pPr>
+            <a:r>
+              <a:rPr sz="1100" b="0" i="0">
+                <a:solidFill>
+                  <a:srgbClr val="5A6372"/>
+                </a:solidFill>
+                <a:latin typeface="Arial"/>
+              </a:rPr>
+              <a:t>1–2 места для контроля расчётов</a:t>
+            </a:r>
+          </a:p>
+          <a:p>
+            <a:pPr algn="l">
+              <a:lnSpc>
+                <a:spcPct val="116000"/>
+              </a:lnSpc>
+            </a:pPr>
+            <a:r>
+              <a:rPr sz="1100" b="0" i="0">
+                <a:solidFill>
+                  <a:srgbClr val="5A6372"/>
+                </a:solidFill>
+                <a:latin typeface="Arial"/>
+              </a:rPr>
+              <a:t>предприятий и сводных проверок.</a:t>
+            </a:r>
+          </a:p>
+        </p:txBody>
+      </p:sp>
+      <p:sp>
+        <p:nvSpPr>
+          <p:cNvPr id="44" name="TextBox 43"/>
+          <p:cNvSpPr txBox="1"/>
+          <p:nvPr/>
+        </p:nvSpPr>
+        <p:spPr>
+          <a:xfrm>
+            <a:off x="566928" y="5029200"/>
+            <a:ext cx="5943600" cy="292608"/>
+          </a:xfrm>
+          <a:prstGeom prst="rect">
+            <a:avLst/>
+          </a:prstGeom>
+          <a:noFill/>
+        </p:spPr>
+        <p:txBody>
+          <a:bodyPr wrap="square" lIns="0" rIns="0" tIns="0" bIns="0" anchor="t">
+            <a:spAutoFit/>
+          </a:bodyPr>
+          <a:lstStyle/>
+          <a:p>
+            <a:pPr algn="l">
+              <a:lnSpc>
+                <a:spcPct val="100000"/>
+              </a:lnSpc>
+            </a:pPr>
+            <a:r>
+              <a:rPr sz="1550" b="1" i="0">
+                <a:solidFill>
+                  <a:srgbClr val="1A3A6B"/>
+                </a:solidFill>
+                <a:latin typeface="Arial"/>
+              </a:rPr>
+              <a:t>Места можно перераспределять</a:t>
+            </a:r>
+          </a:p>
+        </p:txBody>
+      </p:sp>
+      <p:sp>
+        <p:nvSpPr>
+          <p:cNvPr id="45" name="TextBox 44"/>
+          <p:cNvSpPr txBox="1"/>
+          <p:nvPr/>
+        </p:nvSpPr>
+        <p:spPr>
+          <a:xfrm>
+            <a:off x="566928" y="5413248"/>
+            <a:ext cx="5943600" cy="822960"/>
+          </a:xfrm>
+          <a:prstGeom prst="rect">
+            <a:avLst/>
+          </a:prstGeom>
+          <a:noFill/>
+        </p:spPr>
+        <p:txBody>
+          <a:bodyPr wrap="square" lIns="0" rIns="0" tIns="0" bIns="0" anchor="t">
+            <a:spAutoFit/>
+          </a:bodyPr>
+          <a:lstStyle/>
+          <a:p>
+            <a:pPr algn="l">
+              <a:lnSpc>
+                <a:spcPct val="125000"/>
+              </a:lnSpc>
+            </a:pPr>
+            <a:r>
+              <a:rPr sz="1150" b="0" i="0">
+                <a:solidFill>
+                  <a:srgbClr val="5A6372"/>
+                </a:solidFill>
+                <a:latin typeface="Arial"/>
+              </a:rPr>
+              <a:t>Если специалист уволился или сменил компьютер, администратор освобождает</a:t>
+            </a:r>
+          </a:p>
+          <a:p>
+            <a:pPr algn="l">
+              <a:lnSpc>
+                <a:spcPct val="125000"/>
+              </a:lnSpc>
+            </a:pPr>
+            <a:r>
+              <a:rPr sz="1150" b="0" i="0">
+                <a:solidFill>
+                  <a:srgbClr val="5A6372"/>
+                </a:solidFill>
+                <a:latin typeface="Arial"/>
+              </a:rPr>
+              <a:t>место в журнале — оно сразу переходит другому. Докупать при этом ничего</a:t>
+            </a:r>
+          </a:p>
+          <a:p>
+            <a:pPr algn="l">
+              <a:lnSpc>
+                <a:spcPct val="125000"/>
+              </a:lnSpc>
+            </a:pPr>
+            <a:r>
+              <a:rPr sz="1150" b="0" i="0">
+                <a:solidFill>
+                  <a:srgbClr val="5A6372"/>
+                </a:solidFill>
+                <a:latin typeface="Arial"/>
+              </a:rPr>
+              <a:t>не нужно, пока не превышено общее число мест по ключу.</a:t>
+            </a:r>
+          </a:p>
+        </p:txBody>
+      </p:sp>
+      <p:sp>
+        <p:nvSpPr>
+          <p:cNvPr id="46" name="Rectangle 45"/>
+          <p:cNvSpPr/>
+          <p:nvPr/>
+        </p:nvSpPr>
+        <p:spPr>
+          <a:xfrm>
+            <a:off x="0" y="6528816"/>
+            <a:ext cx="12191695" cy="329184"/>
+          </a:xfrm>
+          <a:prstGeom prst="rect">
+            <a:avLst/>
+          </a:prstGeom>
+          <a:solidFill>
+            <a:srgbClr val="F5F5F5"/>
+          </a:solidFill>
+          <a:ln>
+            <a:noFill/>
+          </a:ln>
+          <a:effectLst/>
+        </p:spPr>
+        <p:style>
+          <a:lnRef idx="1">
+            <a:schemeClr val="accent1"/>
+          </a:lnRef>
+          <a:fillRef idx="3">
+            <a:schemeClr val="accent1"/>
+          </a:fillRef>
+          <a:effectRef idx="2">
+            <a:schemeClr val="accent1"/>
+          </a:effectRef>
+          <a:fontRef idx="minor">
+            <a:schemeClr val="lt1"/>
+          </a:fontRef>
+        </p:style>
+        <p:txBody>
+          <a:bodyPr rtlCol="0" anchor="ctr"/>
+          <a:lstStyle/>
+          <a:p>
+            <a:pPr algn="ctr"/>
+          </a:p>
+        </p:txBody>
+      </p:sp>
+      <p:sp>
+        <p:nvSpPr>
+          <p:cNvPr id="47" name="TextBox 46"/>
+          <p:cNvSpPr txBox="1"/>
+          <p:nvPr/>
+        </p:nvSpPr>
+        <p:spPr>
+          <a:xfrm>
+            <a:off x="566928" y="6592824"/>
+            <a:ext cx="7315200" cy="219456"/>
+          </a:xfrm>
+          <a:prstGeom prst="rect">
+            <a:avLst/>
+          </a:prstGeom>
+          <a:noFill/>
+        </p:spPr>
+        <p:txBody>
+          <a:bodyPr wrap="square" lIns="0" rIns="0" tIns="0" bIns="0" anchor="t">
+            <a:spAutoFit/>
+          </a:bodyPr>
+          <a:lstStyle/>
+          <a:p>
+            <a:pPr algn="l">
+              <a:lnSpc>
+                <a:spcPct val="100000"/>
+              </a:lnSpc>
+            </a:pPr>
+            <a:r>
+              <a:rPr sz="950" b="0" i="0">
+                <a:solidFill>
+                  <a:srgbClr val="5A6372"/>
+                </a:solidFill>
+                <a:latin typeface="Arial"/>
+              </a:rPr>
+              <a:t>Расчёт количества мест</a:t>
+            </a:r>
+          </a:p>
+        </p:txBody>
+      </p:sp>
+      <p:sp>
+        <p:nvSpPr>
+          <p:cNvPr id="48" name="TextBox 47"/>
+          <p:cNvSpPr txBox="1"/>
+          <p:nvPr/>
+        </p:nvSpPr>
+        <p:spPr>
+          <a:xfrm>
+            <a:off x="9082735" y="6592824"/>
+            <a:ext cx="2560320" cy="219456"/>
+          </a:xfrm>
+          <a:prstGeom prst="rect">
+            <a:avLst/>
+          </a:prstGeom>
+          <a:noFill/>
+        </p:spPr>
+        <p:txBody>
+          <a:bodyPr wrap="square" lIns="0" rIns="0" tIns="0" bIns="0" anchor="t">
+            <a:spAutoFit/>
+          </a:bodyPr>
+          <a:lstStyle/>
+          <a:p>
+            <a:pPr algn="r">
+              <a:lnSpc>
+                <a:spcPct val="100000"/>
+              </a:lnSpc>
+            </a:pPr>
+            <a:r>
+              <a:rPr sz="950" b="1" i="0">
+                <a:solidFill>
+                  <a:srgbClr val="1A3A6B"/>
+                </a:solidFill>
+                <a:latin typeface="Arial"/>
+              </a:rPr>
+              <a:t>ПВ-Система · Лицензирование</a:t>
+            </a:r>
+          </a:p>
+        </p:txBody>
+      </p:sp>
+    </p:spTree>
+  </p:cSld>
+  <p:clrMapOvr>
+    <a:masterClrMapping/>
+  </p:clrMapOvr>
+</p:sld>
+</file>
+
+<file path=ppt/slides/slide12.xml><?xml version="1.0" encoding="utf-8"?>
+<p:sld xmlns:a="http://schemas.openxmlformats.org/drawingml/2006/main" xmlns:p="http://schemas.openxmlformats.org/presentationml/2006/main" xmlns:r="http://schemas.openxmlformats.org/officeDocument/2006/relationships">
+  <p:cSld>
+    <p:spTree>
+      <p:nvGrpSpPr>
+        <p:cNvPr id="1" name=""/>
+        <p:cNvGrpSpPr/>
+        <p:nvPr/>
+      </p:nvGrpSpPr>
+      <p:grpSpPr/>
+      <p:sp>
+        <p:nvSpPr>
+          <p:cNvPr id="2" name="Rectangle 1"/>
+          <p:cNvSpPr/>
+          <p:nvPr/>
+        </p:nvSpPr>
+        <p:spPr>
+          <a:xfrm>
+            <a:off x="0" y="0"/>
+            <a:ext cx="12191695" cy="6858000"/>
+          </a:xfrm>
+          <a:prstGeom prst="rect">
+            <a:avLst/>
+          </a:prstGeom>
+          <a:solidFill>
+            <a:srgbClr val="FFFFFF"/>
+          </a:solidFill>
+          <a:ln>
+            <a:noFill/>
+          </a:ln>
+          <a:effectLst/>
+        </p:spPr>
+        <p:style>
+          <a:lnRef idx="1">
+            <a:schemeClr val="accent1"/>
+          </a:lnRef>
+          <a:fillRef idx="3">
+            <a:schemeClr val="accent1"/>
+          </a:fillRef>
+          <a:effectRef idx="2">
+            <a:schemeClr val="accent1"/>
+          </a:effectRef>
+          <a:fontRef idx="minor">
+            <a:schemeClr val="lt1"/>
+          </a:fontRef>
+        </p:style>
+        <p:txBody>
+          <a:bodyPr rtlCol="0" anchor="ctr"/>
+          <a:lstStyle/>
+          <a:p>
+            <a:pPr algn="ctr"/>
+          </a:p>
+        </p:txBody>
+      </p:sp>
+      <p:sp>
+        <p:nvSpPr>
+          <p:cNvPr id="3" name="Rectangle 2"/>
+          <p:cNvSpPr/>
+          <p:nvPr/>
+        </p:nvSpPr>
+        <p:spPr>
+          <a:xfrm>
+            <a:off x="0" y="0"/>
+            <a:ext cx="12191695" cy="1024128"/>
+          </a:xfrm>
+          <a:prstGeom prst="rect">
+            <a:avLst/>
+          </a:prstGeom>
+          <a:solidFill>
+            <a:srgbClr val="1A3A6B"/>
+          </a:solidFill>
+          <a:ln>
+            <a:noFill/>
+          </a:ln>
+          <a:effectLst/>
+        </p:spPr>
+        <p:style>
+          <a:lnRef idx="1">
+            <a:schemeClr val="accent1"/>
+          </a:lnRef>
+          <a:fillRef idx="3">
+            <a:schemeClr val="accent1"/>
+          </a:fillRef>
+          <a:effectRef idx="2">
+            <a:schemeClr val="accent1"/>
+          </a:effectRef>
+          <a:fontRef idx="minor">
+            <a:schemeClr val="lt1"/>
+          </a:fontRef>
+        </p:style>
+        <p:txBody>
+          <a:bodyPr rtlCol="0" anchor="ctr"/>
+          <a:lstStyle/>
+          <a:p>
+            <a:pPr algn="ctr"/>
+          </a:p>
+        </p:txBody>
+      </p:sp>
+      <p:sp>
+        <p:nvSpPr>
+          <p:cNvPr id="4" name="Rectangle 3"/>
+          <p:cNvSpPr/>
+          <p:nvPr/>
+        </p:nvSpPr>
+        <p:spPr>
+          <a:xfrm>
+            <a:off x="0" y="1024128"/>
+            <a:ext cx="12191695" cy="41148"/>
+          </a:xfrm>
+          <a:prstGeom prst="rect">
+            <a:avLst/>
+          </a:prstGeom>
+          <a:solidFill>
+            <a:srgbClr val="2563EB"/>
+          </a:solidFill>
+          <a:ln>
+            <a:noFill/>
+          </a:ln>
+          <a:effectLst/>
+        </p:spPr>
+        <p:style>
+          <a:lnRef idx="1">
+            <a:schemeClr val="accent1"/>
+          </a:lnRef>
+          <a:fillRef idx="3">
+            <a:schemeClr val="accent1"/>
+          </a:fillRef>
+          <a:effectRef idx="2">
+            <a:schemeClr val="accent1"/>
+          </a:effectRef>
+          <a:fontRef idx="minor">
+            <a:schemeClr val="lt1"/>
+          </a:fontRef>
+        </p:style>
+        <p:txBody>
+          <a:bodyPr rtlCol="0" anchor="ctr"/>
+          <a:lstStyle/>
+          <a:p>
+            <a:pPr algn="ctr"/>
+          </a:p>
+        </p:txBody>
+      </p:sp>
+      <p:sp>
+        <p:nvSpPr>
+          <p:cNvPr id="5" name="TextBox 4"/>
+          <p:cNvSpPr txBox="1"/>
+          <p:nvPr/>
+        </p:nvSpPr>
+        <p:spPr>
+          <a:xfrm>
+            <a:off x="566928" y="219456"/>
+            <a:ext cx="9692640" cy="457200"/>
+          </a:xfrm>
+          <a:prstGeom prst="rect">
+            <a:avLst/>
+          </a:prstGeom>
+          <a:noFill/>
+        </p:spPr>
+        <p:txBody>
+          <a:bodyPr wrap="square" lIns="0" rIns="0" tIns="0" bIns="0" anchor="t">
+            <a:spAutoFit/>
+          </a:bodyPr>
+          <a:lstStyle/>
+          <a:p>
+            <a:pPr algn="l">
+              <a:lnSpc>
+                <a:spcPct val="100000"/>
+              </a:lnSpc>
+            </a:pPr>
+            <a:r>
+              <a:rPr sz="2700" b="1" i="0">
+                <a:solidFill>
+                  <a:srgbClr val="FFFFFF"/>
+                </a:solidFill>
+                <a:latin typeface="Arial"/>
+              </a:rPr>
+              <a:t>Расчёт стоимости для группы предприятий</a:t>
+            </a:r>
+          </a:p>
+        </p:txBody>
+      </p:sp>
+      <p:sp>
+        <p:nvSpPr>
+          <p:cNvPr id="6" name="TextBox 5"/>
+          <p:cNvSpPr txBox="1"/>
+          <p:nvPr/>
+        </p:nvSpPr>
+        <p:spPr>
+          <a:xfrm>
+            <a:off x="566928" y="676656"/>
+            <a:ext cx="9875520" cy="274320"/>
+          </a:xfrm>
+          <a:prstGeom prst="rect">
+            <a:avLst/>
+          </a:prstGeom>
+          <a:noFill/>
+        </p:spPr>
+        <p:txBody>
+          <a:bodyPr wrap="square" lIns="0" rIns="0" tIns="0" bIns="0" anchor="t">
+            <a:spAutoFit/>
+          </a:bodyPr>
+          <a:lstStyle/>
+          <a:p>
+            <a:pPr algn="l">
+              <a:lnSpc>
+                <a:spcPct val="100000"/>
+              </a:lnSpc>
+            </a:pPr>
+            <a:r>
+              <a:rPr sz="1250" b="0" i="0">
+                <a:solidFill>
+                  <a:srgbClr val="7CB8FB"/>
+                </a:solidFill>
+                <a:latin typeface="Arial"/>
+              </a:rPr>
+              <a:t>От числа рабочих мест — по действующему предложению</a:t>
+            </a:r>
+          </a:p>
+        </p:txBody>
+      </p:sp>
+      <p:sp>
+        <p:nvSpPr>
+          <p:cNvPr id="7" name="TextBox 6"/>
+          <p:cNvSpPr txBox="1"/>
+          <p:nvPr/>
+        </p:nvSpPr>
+        <p:spPr>
+          <a:xfrm>
+            <a:off x="10820095" y="310896"/>
+            <a:ext cx="822960" cy="457200"/>
+          </a:xfrm>
+          <a:prstGeom prst="rect">
+            <a:avLst/>
+          </a:prstGeom>
+          <a:noFill/>
+        </p:spPr>
+        <p:txBody>
+          <a:bodyPr wrap="square" lIns="0" rIns="0" tIns="0" bIns="0" anchor="t">
+            <a:spAutoFit/>
+          </a:bodyPr>
+          <a:lstStyle/>
+          <a:p>
+            <a:pPr algn="r">
+              <a:lnSpc>
+                <a:spcPct val="100000"/>
+              </a:lnSpc>
+            </a:pPr>
+            <a:r>
+              <a:rPr sz="2200" b="1" i="0">
+                <a:solidFill>
+                  <a:srgbClr val="4A6BA0"/>
+                </a:solidFill>
+                <a:latin typeface="Arial"/>
+              </a:rPr>
+              <a:t>11</a:t>
+            </a:r>
+          </a:p>
+        </p:txBody>
+      </p:sp>
+      <p:sp>
+        <p:nvSpPr>
+          <p:cNvPr id="8" name="TextBox 7"/>
+          <p:cNvSpPr txBox="1"/>
+          <p:nvPr/>
+        </p:nvSpPr>
+        <p:spPr>
+          <a:xfrm>
+            <a:off x="566928" y="1353312"/>
+            <a:ext cx="11064240" cy="384048"/>
+          </a:xfrm>
+          <a:prstGeom prst="rect">
+            <a:avLst/>
+          </a:prstGeom>
+          <a:noFill/>
+        </p:spPr>
+        <p:txBody>
+          <a:bodyPr wrap="square" lIns="0" rIns="0" tIns="0" bIns="0" anchor="t">
+            <a:spAutoFit/>
+          </a:bodyPr>
+          <a:lstStyle/>
+          <a:p>
+            <a:pPr algn="l">
+              <a:lnSpc>
+                <a:spcPct val="100000"/>
+              </a:lnSpc>
+            </a:pPr>
+            <a:r>
+              <a:rPr sz="1350" b="0" i="0">
+                <a:solidFill>
+                  <a:srgbClr val="1F1F1F"/>
+                </a:solidFill>
+                <a:latin typeface="Arial"/>
+              </a:rPr>
+              <a:t>Лицензия годовая. В стоимость входят установка, обучение персонала, поддержка и обновления.</a:t>
+            </a:r>
+          </a:p>
+        </p:txBody>
+      </p:sp>
+      <p:sp>
+        <p:nvSpPr>
+          <p:cNvPr id="9" name="Rectangle 8"/>
+          <p:cNvSpPr/>
+          <p:nvPr/>
+        </p:nvSpPr>
+        <p:spPr>
+          <a:xfrm>
+            <a:off x="566928" y="1828800"/>
+            <a:ext cx="3611880" cy="1371600"/>
+          </a:xfrm>
+          <a:prstGeom prst="rect">
+            <a:avLst/>
+          </a:prstGeom>
+          <a:solidFill>
+            <a:srgbClr val="1A3A6B"/>
+          </a:solidFill>
+          <a:ln>
+            <a:noFill/>
+          </a:ln>
+          <a:effectLst/>
+        </p:spPr>
+        <p:style>
+          <a:lnRef idx="1">
+            <a:schemeClr val="accent1"/>
+          </a:lnRef>
+          <a:fillRef idx="3">
+            <a:schemeClr val="accent1"/>
+          </a:fillRef>
+          <a:effectRef idx="2">
+            <a:schemeClr val="accent1"/>
+          </a:effectRef>
+          <a:fontRef idx="minor">
+            <a:schemeClr val="lt1"/>
+          </a:fontRef>
+        </p:style>
+        <p:txBody>
+          <a:bodyPr rtlCol="0" anchor="ctr"/>
+          <a:lstStyle/>
+          <a:p>
+            <a:pPr algn="ctr"/>
+          </a:p>
+        </p:txBody>
+      </p:sp>
+      <p:sp>
+        <p:nvSpPr>
+          <p:cNvPr id="10" name="TextBox 9"/>
+          <p:cNvSpPr txBox="1"/>
+          <p:nvPr/>
+        </p:nvSpPr>
+        <p:spPr>
+          <a:xfrm>
+            <a:off x="566928" y="1993392"/>
+            <a:ext cx="3611880" cy="256032"/>
+          </a:xfrm>
+          <a:prstGeom prst="rect">
+            <a:avLst/>
+          </a:prstGeom>
+          <a:noFill/>
+        </p:spPr>
+        <p:txBody>
+          <a:bodyPr wrap="square" lIns="0" rIns="0" tIns="0" bIns="0" anchor="t">
+            <a:spAutoFit/>
+          </a:bodyPr>
+          <a:lstStyle/>
+          <a:p>
+            <a:pPr algn="ctr">
+              <a:lnSpc>
+                <a:spcPct val="100000"/>
+              </a:lnSpc>
+            </a:pPr>
+            <a:r>
+              <a:rPr sz="1100" b="1" i="0">
+                <a:solidFill>
+                  <a:srgbClr val="7CB8FB"/>
+                </a:solidFill>
+                <a:latin typeface="Arial"/>
+              </a:rPr>
+              <a:t>БАЗОВЫЙ ПАКЕТ</a:t>
+            </a:r>
+          </a:p>
+        </p:txBody>
+      </p:sp>
+      <p:sp>
+        <p:nvSpPr>
+          <p:cNvPr id="11" name="TextBox 10"/>
+          <p:cNvSpPr txBox="1"/>
+          <p:nvPr/>
+        </p:nvSpPr>
+        <p:spPr>
+          <a:xfrm>
+            <a:off x="566928" y="2286000"/>
+            <a:ext cx="3611880" cy="457200"/>
+          </a:xfrm>
+          <a:prstGeom prst="rect">
+            <a:avLst/>
+          </a:prstGeom>
+          <a:noFill/>
+        </p:spPr>
+        <p:txBody>
+          <a:bodyPr wrap="square" lIns="0" rIns="0" tIns="0" bIns="0" anchor="t">
+            <a:spAutoFit/>
+          </a:bodyPr>
+          <a:lstStyle/>
+          <a:p>
+            <a:pPr algn="ctr">
+              <a:lnSpc>
+                <a:spcPct val="100000"/>
+              </a:lnSpc>
+            </a:pPr>
+            <a:r>
+              <a:rPr sz="2600" b="1" i="0">
+                <a:solidFill>
+                  <a:srgbClr val="FFFFFF"/>
+                </a:solidFill>
+                <a:latin typeface="Arial"/>
+              </a:rPr>
+              <a:t>1 200 000 ₽</a:t>
+            </a:r>
+          </a:p>
+        </p:txBody>
+      </p:sp>
+      <p:sp>
+        <p:nvSpPr>
+          <p:cNvPr id="12" name="TextBox 11"/>
+          <p:cNvSpPr txBox="1"/>
+          <p:nvPr/>
+        </p:nvSpPr>
+        <p:spPr>
+          <a:xfrm>
+            <a:off x="566928" y="2788920"/>
+            <a:ext cx="3611880" cy="256032"/>
+          </a:xfrm>
+          <a:prstGeom prst="rect">
+            <a:avLst/>
+          </a:prstGeom>
+          <a:noFill/>
+        </p:spPr>
+        <p:txBody>
+          <a:bodyPr wrap="square" lIns="0" rIns="0" tIns="0" bIns="0" anchor="t">
+            <a:spAutoFit/>
+          </a:bodyPr>
+          <a:lstStyle/>
+          <a:p>
+            <a:pPr algn="ctr">
+              <a:lnSpc>
+                <a:spcPct val="100000"/>
+              </a:lnSpc>
+            </a:pPr>
+            <a:r>
+              <a:rPr sz="1050" b="0" i="0">
+                <a:solidFill>
+                  <a:srgbClr val="B8CAE6"/>
+                </a:solidFill>
+                <a:latin typeface="Arial"/>
+              </a:rPr>
+              <a:t>за 5 рабочих мест · 1 год</a:t>
+            </a:r>
+          </a:p>
+        </p:txBody>
+      </p:sp>
+      <p:sp>
+        <p:nvSpPr>
+          <p:cNvPr id="13" name="Rectangle 12"/>
+          <p:cNvSpPr/>
+          <p:nvPr/>
+        </p:nvSpPr>
+        <p:spPr>
+          <a:xfrm>
+            <a:off x="4334256" y="1828800"/>
+            <a:ext cx="3611880" cy="1371600"/>
+          </a:xfrm>
+          <a:prstGeom prst="rect">
+            <a:avLst/>
+          </a:prstGeom>
+          <a:solidFill>
+            <a:srgbClr val="FFFFFF"/>
+          </a:solidFill>
+          <a:ln w="19050">
+            <a:solidFill>
+              <a:srgbClr val="2563EB"/>
+            </a:solidFill>
+          </a:ln>
+          <a:effectLst/>
+        </p:spPr>
+        <p:style>
+          <a:lnRef idx="1">
+            <a:schemeClr val="accent1"/>
+          </a:lnRef>
+          <a:fillRef idx="3">
+            <a:schemeClr val="accent1"/>
+          </a:fillRef>
+          <a:effectRef idx="2">
+            <a:schemeClr val="accent1"/>
+          </a:effectRef>
+          <a:fontRef idx="minor">
+            <a:schemeClr val="lt1"/>
+          </a:fontRef>
+        </p:style>
+        <p:txBody>
+          <a:bodyPr rtlCol="0" anchor="ctr"/>
+          <a:lstStyle/>
+          <a:p>
+            <a:pPr algn="ctr"/>
+          </a:p>
+        </p:txBody>
+      </p:sp>
+      <p:sp>
+        <p:nvSpPr>
+          <p:cNvPr id="14" name="TextBox 13"/>
+          <p:cNvSpPr txBox="1"/>
+          <p:nvPr/>
+        </p:nvSpPr>
+        <p:spPr>
+          <a:xfrm>
+            <a:off x="4334256" y="1993392"/>
+            <a:ext cx="3611880" cy="256032"/>
+          </a:xfrm>
+          <a:prstGeom prst="rect">
+            <a:avLst/>
+          </a:prstGeom>
+          <a:noFill/>
+        </p:spPr>
+        <p:txBody>
+          <a:bodyPr wrap="square" lIns="0" rIns="0" tIns="0" bIns="0" anchor="t">
+            <a:spAutoFit/>
+          </a:bodyPr>
+          <a:lstStyle/>
+          <a:p>
+            <a:pPr algn="ctr">
+              <a:lnSpc>
+                <a:spcPct val="100000"/>
+              </a:lnSpc>
+            </a:pPr>
+            <a:r>
+              <a:rPr sz="1100" b="1" i="0">
+                <a:solidFill>
+                  <a:srgbClr val="2563EB"/>
+                </a:solidFill>
+                <a:latin typeface="Arial"/>
+              </a:rPr>
+              <a:t>ОДНО РАБОЧЕЕ МЕСТО</a:t>
+            </a:r>
+          </a:p>
+        </p:txBody>
+      </p:sp>
+      <p:sp>
+        <p:nvSpPr>
+          <p:cNvPr id="15" name="TextBox 14"/>
+          <p:cNvSpPr txBox="1"/>
+          <p:nvPr/>
+        </p:nvSpPr>
+        <p:spPr>
+          <a:xfrm>
+            <a:off x="4334256" y="2286000"/>
+            <a:ext cx="3611880" cy="457200"/>
+          </a:xfrm>
+          <a:prstGeom prst="rect">
+            <a:avLst/>
+          </a:prstGeom>
+          <a:noFill/>
+        </p:spPr>
+        <p:txBody>
+          <a:bodyPr wrap="square" lIns="0" rIns="0" tIns="0" bIns="0" anchor="t">
+            <a:spAutoFit/>
+          </a:bodyPr>
+          <a:lstStyle/>
+          <a:p>
+            <a:pPr algn="ctr">
+              <a:lnSpc>
+                <a:spcPct val="100000"/>
+              </a:lnSpc>
+            </a:pPr>
+            <a:r>
+              <a:rPr sz="2600" b="1" i="0">
+                <a:solidFill>
+                  <a:srgbClr val="1A3A6B"/>
+                </a:solidFill>
+                <a:latin typeface="Arial"/>
+              </a:rPr>
+              <a:t>240 000 ₽</a:t>
+            </a:r>
+          </a:p>
+        </p:txBody>
+      </p:sp>
+      <p:sp>
+        <p:nvSpPr>
+          <p:cNvPr id="16" name="TextBox 15"/>
+          <p:cNvSpPr txBox="1"/>
+          <p:nvPr/>
+        </p:nvSpPr>
+        <p:spPr>
+          <a:xfrm>
+            <a:off x="4334256" y="2788920"/>
+            <a:ext cx="3611880" cy="256032"/>
+          </a:xfrm>
+          <a:prstGeom prst="rect">
+            <a:avLst/>
+          </a:prstGeom>
+          <a:noFill/>
+        </p:spPr>
+        <p:txBody>
+          <a:bodyPr wrap="square" lIns="0" rIns="0" tIns="0" bIns="0" anchor="t">
+            <a:spAutoFit/>
+          </a:bodyPr>
+          <a:lstStyle/>
+          <a:p>
+            <a:pPr algn="ctr">
+              <a:lnSpc>
+                <a:spcPct val="100000"/>
+              </a:lnSpc>
+            </a:pPr>
+            <a:r>
+              <a:rPr sz="1050" b="0" i="0">
+                <a:solidFill>
+                  <a:srgbClr val="5A6372"/>
+                </a:solidFill>
+                <a:latin typeface="Arial"/>
+              </a:rPr>
+              <a:t>в год · при пакете из 5 мест</a:t>
+            </a:r>
+          </a:p>
+        </p:txBody>
+      </p:sp>
+      <p:sp>
+        <p:nvSpPr>
+          <p:cNvPr id="17" name="Rectangle 16"/>
+          <p:cNvSpPr/>
+          <p:nvPr/>
+        </p:nvSpPr>
+        <p:spPr>
+          <a:xfrm>
+            <a:off x="8101583" y="1828800"/>
+            <a:ext cx="3529584" cy="1371600"/>
+          </a:xfrm>
+          <a:prstGeom prst="rect">
+            <a:avLst/>
+          </a:prstGeom>
+          <a:solidFill>
+            <a:srgbClr val="FFFFFF"/>
+          </a:solidFill>
+          <a:ln w="19050">
+            <a:solidFill>
+              <a:srgbClr val="15803D"/>
+            </a:solidFill>
+          </a:ln>
+          <a:effectLst/>
+        </p:spPr>
+        <p:style>
+          <a:lnRef idx="1">
+            <a:schemeClr val="accent1"/>
+          </a:lnRef>
+          <a:fillRef idx="3">
+            <a:schemeClr val="accent1"/>
+          </a:fillRef>
+          <a:effectRef idx="2">
+            <a:schemeClr val="accent1"/>
+          </a:effectRef>
+          <a:fontRef idx="minor">
+            <a:schemeClr val="lt1"/>
+          </a:fontRef>
+        </p:style>
+        <p:txBody>
+          <a:bodyPr rtlCol="0" anchor="ctr"/>
+          <a:lstStyle/>
+          <a:p>
+            <a:pPr algn="ctr"/>
+          </a:p>
+        </p:txBody>
+      </p:sp>
+      <p:sp>
+        <p:nvSpPr>
+          <p:cNvPr id="18" name="TextBox 17"/>
+          <p:cNvSpPr txBox="1"/>
+          <p:nvPr/>
+        </p:nvSpPr>
+        <p:spPr>
+          <a:xfrm>
+            <a:off x="8101583" y="1993392"/>
+            <a:ext cx="3529584" cy="256032"/>
+          </a:xfrm>
+          <a:prstGeom prst="rect">
+            <a:avLst/>
+          </a:prstGeom>
+          <a:noFill/>
+        </p:spPr>
+        <p:txBody>
+          <a:bodyPr wrap="square" lIns="0" rIns="0" tIns="0" bIns="0" anchor="t">
+            <a:spAutoFit/>
+          </a:bodyPr>
+          <a:lstStyle/>
+          <a:p>
+            <a:pPr algn="ctr">
+              <a:lnSpc>
+                <a:spcPct val="100000"/>
+              </a:lnSpc>
+            </a:pPr>
+            <a:r>
+              <a:rPr sz="1100" b="1" i="0">
+                <a:solidFill>
+                  <a:srgbClr val="15803D"/>
+                </a:solidFill>
+                <a:latin typeface="Arial"/>
+              </a:rPr>
+              <a:t>В ПЕРЕСЧЁТЕ НА МЕСЯЦ</a:t>
+            </a:r>
+          </a:p>
+        </p:txBody>
+      </p:sp>
+      <p:sp>
+        <p:nvSpPr>
+          <p:cNvPr id="19" name="TextBox 18"/>
+          <p:cNvSpPr txBox="1"/>
+          <p:nvPr/>
+        </p:nvSpPr>
+        <p:spPr>
+          <a:xfrm>
+            <a:off x="8101583" y="2286000"/>
+            <a:ext cx="3529584" cy="457200"/>
+          </a:xfrm>
+          <a:prstGeom prst="rect">
+            <a:avLst/>
+          </a:prstGeom>
+          <a:noFill/>
+        </p:spPr>
+        <p:txBody>
+          <a:bodyPr wrap="square" lIns="0" rIns="0" tIns="0" bIns="0" anchor="t">
+            <a:spAutoFit/>
+          </a:bodyPr>
+          <a:lstStyle/>
+          <a:p>
+            <a:pPr algn="ctr">
+              <a:lnSpc>
+                <a:spcPct val="100000"/>
+              </a:lnSpc>
+            </a:pPr>
+            <a:r>
+              <a:rPr sz="2600" b="1" i="0">
+                <a:solidFill>
+                  <a:srgbClr val="1A3A6B"/>
+                </a:solidFill>
+                <a:latin typeface="Arial"/>
+              </a:rPr>
+              <a:t>20 000 ₽</a:t>
+            </a:r>
+          </a:p>
+        </p:txBody>
+      </p:sp>
+      <p:sp>
+        <p:nvSpPr>
+          <p:cNvPr id="20" name="TextBox 19"/>
+          <p:cNvSpPr txBox="1"/>
+          <p:nvPr/>
+        </p:nvSpPr>
+        <p:spPr>
+          <a:xfrm>
+            <a:off x="8101583" y="2788920"/>
+            <a:ext cx="3529584" cy="256032"/>
+          </a:xfrm>
+          <a:prstGeom prst="rect">
+            <a:avLst/>
+          </a:prstGeom>
+          <a:noFill/>
+        </p:spPr>
+        <p:txBody>
+          <a:bodyPr wrap="square" lIns="0" rIns="0" tIns="0" bIns="0" anchor="t">
+            <a:spAutoFit/>
+          </a:bodyPr>
+          <a:lstStyle/>
+          <a:p>
+            <a:pPr algn="ctr">
+              <a:lnSpc>
+                <a:spcPct val="100000"/>
+              </a:lnSpc>
+            </a:pPr>
+            <a:r>
+              <a:rPr sz="1050" b="0" i="0">
+                <a:solidFill>
+                  <a:srgbClr val="5A6372"/>
+                </a:solidFill>
+                <a:latin typeface="Arial"/>
+              </a:rPr>
+              <a:t>на одного специалиста</a:t>
+            </a:r>
+          </a:p>
+        </p:txBody>
+      </p:sp>
+      <p:sp>
+        <p:nvSpPr>
+          <p:cNvPr id="21" name="TextBox 20"/>
+          <p:cNvSpPr txBox="1"/>
+          <p:nvPr/>
+        </p:nvSpPr>
+        <p:spPr>
+          <a:xfrm>
+            <a:off x="566928" y="3364992"/>
+            <a:ext cx="11064240" cy="292608"/>
+          </a:xfrm>
+          <a:prstGeom prst="rect">
+            <a:avLst/>
+          </a:prstGeom>
+          <a:noFill/>
+        </p:spPr>
+        <p:txBody>
+          <a:bodyPr wrap="square" lIns="0" rIns="0" tIns="0" bIns="0" anchor="t">
+            <a:spAutoFit/>
+          </a:bodyPr>
+          <a:lstStyle/>
+          <a:p>
+            <a:pPr algn="l">
+              <a:lnSpc>
+                <a:spcPct val="100000"/>
+              </a:lnSpc>
+            </a:pPr>
+            <a:r>
+              <a:rPr sz="1650" b="1" i="0">
+                <a:solidFill>
+                  <a:srgbClr val="1A3A6B"/>
+                </a:solidFill>
+                <a:latin typeface="Arial"/>
+              </a:rPr>
+              <a:t>Варианты для группы предприятий</a:t>
+            </a:r>
+          </a:p>
+        </p:txBody>
+      </p:sp>
+      <p:sp>
+        <p:nvSpPr>
+          <p:cNvPr id="22" name="Rectangle 21"/>
+          <p:cNvSpPr/>
+          <p:nvPr/>
+        </p:nvSpPr>
+        <p:spPr>
+          <a:xfrm>
+            <a:off x="566928" y="3767328"/>
+            <a:ext cx="11064240" cy="420624"/>
+          </a:xfrm>
+          <a:prstGeom prst="rect">
+            <a:avLst/>
+          </a:prstGeom>
+          <a:solidFill>
+            <a:srgbClr val="1A3A6B"/>
+          </a:solidFill>
+          <a:ln>
+            <a:noFill/>
+          </a:ln>
+          <a:effectLst/>
+        </p:spPr>
+        <p:style>
+          <a:lnRef idx="1">
+            <a:schemeClr val="accent1"/>
+          </a:lnRef>
+          <a:fillRef idx="3">
+            <a:schemeClr val="accent1"/>
+          </a:fillRef>
+          <a:effectRef idx="2">
+            <a:schemeClr val="accent1"/>
+          </a:effectRef>
+          <a:fontRef idx="minor">
+            <a:schemeClr val="lt1"/>
+          </a:fontRef>
+        </p:style>
+        <p:txBody>
+          <a:bodyPr rtlCol="0" anchor="ctr"/>
+          <a:lstStyle/>
+          <a:p>
+            <a:pPr algn="ctr"/>
+          </a:p>
+        </p:txBody>
+      </p:sp>
+      <p:sp>
+        <p:nvSpPr>
+          <p:cNvPr id="23" name="TextBox 22"/>
+          <p:cNvSpPr txBox="1"/>
+          <p:nvPr/>
+        </p:nvSpPr>
+        <p:spPr>
+          <a:xfrm>
+            <a:off x="694944" y="3845052"/>
+            <a:ext cx="4901183" cy="420624"/>
+          </a:xfrm>
+          <a:prstGeom prst="rect">
+            <a:avLst/>
+          </a:prstGeom>
+          <a:noFill/>
+        </p:spPr>
+        <p:txBody>
+          <a:bodyPr wrap="square" lIns="0" rIns="0" tIns="0" bIns="0" anchor="t">
+            <a:spAutoFit/>
+          </a:bodyPr>
+          <a:lstStyle/>
+          <a:p>
+            <a:pPr algn="l">
+              <a:lnSpc>
+                <a:spcPct val="100000"/>
+              </a:lnSpc>
+            </a:pPr>
+            <a:r>
+              <a:rPr sz="1150" b="1" i="0">
+                <a:solidFill>
+                  <a:srgbClr val="FFFFFF"/>
+                </a:solidFill>
+                <a:latin typeface="Arial"/>
+              </a:rPr>
+              <a:t>Состав</a:t>
+            </a:r>
+          </a:p>
+        </p:txBody>
+      </p:sp>
+      <p:sp>
+        <p:nvSpPr>
+          <p:cNvPr id="24" name="TextBox 23"/>
+          <p:cNvSpPr txBox="1"/>
+          <p:nvPr/>
+        </p:nvSpPr>
+        <p:spPr>
+          <a:xfrm>
+            <a:off x="5815583" y="3845052"/>
+            <a:ext cx="1152144" cy="420624"/>
+          </a:xfrm>
+          <a:prstGeom prst="rect">
+            <a:avLst/>
+          </a:prstGeom>
+          <a:noFill/>
+        </p:spPr>
+        <p:txBody>
+          <a:bodyPr wrap="square" lIns="0" rIns="0" tIns="0" bIns="0" anchor="t">
+            <a:spAutoFit/>
+          </a:bodyPr>
+          <a:lstStyle/>
+          <a:p>
+            <a:pPr algn="ctr">
+              <a:lnSpc>
+                <a:spcPct val="100000"/>
+              </a:lnSpc>
+            </a:pPr>
+            <a:r>
+              <a:rPr sz="1150" b="1" i="0">
+                <a:solidFill>
+                  <a:srgbClr val="FFFFFF"/>
+                </a:solidFill>
+                <a:latin typeface="Arial"/>
+              </a:rPr>
+              <a:t>Мест</a:t>
+            </a:r>
+          </a:p>
+        </p:txBody>
+      </p:sp>
+      <p:sp>
+        <p:nvSpPr>
+          <p:cNvPr id="25" name="TextBox 24"/>
+          <p:cNvSpPr txBox="1"/>
+          <p:nvPr/>
+        </p:nvSpPr>
+        <p:spPr>
+          <a:xfrm>
+            <a:off x="7187183" y="3845052"/>
+            <a:ext cx="1426464" cy="420624"/>
+          </a:xfrm>
+          <a:prstGeom prst="rect">
+            <a:avLst/>
+          </a:prstGeom>
+          <a:noFill/>
+        </p:spPr>
+        <p:txBody>
+          <a:bodyPr wrap="square" lIns="0" rIns="0" tIns="0" bIns="0" anchor="t">
+            <a:spAutoFit/>
+          </a:bodyPr>
+          <a:lstStyle/>
+          <a:p>
+            <a:pPr algn="ctr">
+              <a:lnSpc>
+                <a:spcPct val="100000"/>
+              </a:lnSpc>
+            </a:pPr>
+            <a:r>
+              <a:rPr sz="1150" b="1" i="0">
+                <a:solidFill>
+                  <a:srgbClr val="FFFFFF"/>
+                </a:solidFill>
+                <a:latin typeface="Arial"/>
+              </a:rPr>
+              <a:t>Пакетов</a:t>
+            </a:r>
+          </a:p>
+        </p:txBody>
+      </p:sp>
+      <p:sp>
+        <p:nvSpPr>
+          <p:cNvPr id="26" name="TextBox 25"/>
+          <p:cNvSpPr txBox="1"/>
+          <p:nvPr/>
+        </p:nvSpPr>
+        <p:spPr>
+          <a:xfrm>
+            <a:off x="8833104" y="3845052"/>
+            <a:ext cx="2706624" cy="420624"/>
+          </a:xfrm>
+          <a:prstGeom prst="rect">
+            <a:avLst/>
+          </a:prstGeom>
+          <a:noFill/>
+        </p:spPr>
+        <p:txBody>
+          <a:bodyPr wrap="square" lIns="0" rIns="0" tIns="0" bIns="0" anchor="t">
+            <a:spAutoFit/>
+          </a:bodyPr>
+          <a:lstStyle/>
+          <a:p>
+            <a:pPr algn="r">
+              <a:lnSpc>
+                <a:spcPct val="100000"/>
+              </a:lnSpc>
+            </a:pPr>
+            <a:r>
+              <a:rPr sz="1150" b="1" i="0">
+                <a:solidFill>
+                  <a:srgbClr val="FFFFFF"/>
+                </a:solidFill>
+                <a:latin typeface="Arial"/>
+              </a:rPr>
+              <a:t>Стоимость, ₽ / год</a:t>
+            </a:r>
+          </a:p>
+        </p:txBody>
+      </p:sp>
+      <p:sp>
+        <p:nvSpPr>
+          <p:cNvPr id="27" name="TextBox 26"/>
+          <p:cNvSpPr txBox="1"/>
+          <p:nvPr/>
+        </p:nvSpPr>
+        <p:spPr>
+          <a:xfrm>
+            <a:off x="694944" y="4265676"/>
+            <a:ext cx="4901183" cy="420624"/>
+          </a:xfrm>
+          <a:prstGeom prst="rect">
+            <a:avLst/>
+          </a:prstGeom>
+          <a:noFill/>
+        </p:spPr>
+        <p:txBody>
+          <a:bodyPr wrap="square" lIns="0" rIns="0" tIns="0" bIns="0" anchor="t">
+            <a:spAutoFit/>
+          </a:bodyPr>
+          <a:lstStyle/>
+          <a:p>
+            <a:pPr algn="l">
+              <a:lnSpc>
+                <a:spcPct val="100000"/>
+              </a:lnSpc>
+            </a:pPr>
+            <a:r>
+              <a:rPr sz="1150" b="0" i="0">
+                <a:solidFill>
+                  <a:srgbClr val="1F1F1F"/>
+                </a:solidFill>
+                <a:latin typeface="Arial"/>
+              </a:rPr>
+              <a:t>Один рудник — пилотный проект</a:t>
+            </a:r>
+          </a:p>
+        </p:txBody>
+      </p:sp>
+      <p:sp>
+        <p:nvSpPr>
+          <p:cNvPr id="28" name="TextBox 27"/>
+          <p:cNvSpPr txBox="1"/>
+          <p:nvPr/>
+        </p:nvSpPr>
+        <p:spPr>
+          <a:xfrm>
+            <a:off x="5815583" y="4265676"/>
+            <a:ext cx="1152144" cy="420624"/>
+          </a:xfrm>
+          <a:prstGeom prst="rect">
+            <a:avLst/>
+          </a:prstGeom>
+          <a:noFill/>
+        </p:spPr>
+        <p:txBody>
+          <a:bodyPr wrap="square" lIns="0" rIns="0" tIns="0" bIns="0" anchor="t">
+            <a:spAutoFit/>
+          </a:bodyPr>
+          <a:lstStyle/>
+          <a:p>
+            <a:pPr algn="ctr">
+              <a:lnSpc>
+                <a:spcPct val="100000"/>
+              </a:lnSpc>
+            </a:pPr>
+            <a:r>
+              <a:rPr sz="1150" b="0" i="0">
+                <a:solidFill>
+                  <a:srgbClr val="1F1F1F"/>
+                </a:solidFill>
+                <a:latin typeface="Arial"/>
+              </a:rPr>
+              <a:t>5</a:t>
+            </a:r>
+          </a:p>
+        </p:txBody>
+      </p:sp>
+      <p:sp>
+        <p:nvSpPr>
+          <p:cNvPr id="29" name="TextBox 28"/>
+          <p:cNvSpPr txBox="1"/>
+          <p:nvPr/>
+        </p:nvSpPr>
+        <p:spPr>
+          <a:xfrm>
+            <a:off x="7187183" y="4265676"/>
+            <a:ext cx="1426464" cy="420624"/>
+          </a:xfrm>
+          <a:prstGeom prst="rect">
+            <a:avLst/>
+          </a:prstGeom>
+          <a:noFill/>
+        </p:spPr>
+        <p:txBody>
+          <a:bodyPr wrap="square" lIns="0" rIns="0" tIns="0" bIns="0" anchor="t">
+            <a:spAutoFit/>
+          </a:bodyPr>
+          <a:lstStyle/>
+          <a:p>
+            <a:pPr algn="ctr">
+              <a:lnSpc>
+                <a:spcPct val="100000"/>
+              </a:lnSpc>
+            </a:pPr>
+            <a:r>
+              <a:rPr sz="1150" b="0" i="0">
+                <a:solidFill>
+                  <a:srgbClr val="1F1F1F"/>
+                </a:solidFill>
+                <a:latin typeface="Arial"/>
+              </a:rPr>
+              <a:t>1</a:t>
+            </a:r>
+          </a:p>
+        </p:txBody>
+      </p:sp>
+      <p:sp>
+        <p:nvSpPr>
+          <p:cNvPr id="30" name="TextBox 29"/>
+          <p:cNvSpPr txBox="1"/>
+          <p:nvPr/>
+        </p:nvSpPr>
+        <p:spPr>
+          <a:xfrm>
+            <a:off x="8833104" y="4265676"/>
+            <a:ext cx="2706624" cy="420624"/>
+          </a:xfrm>
+          <a:prstGeom prst="rect">
+            <a:avLst/>
+          </a:prstGeom>
+          <a:noFill/>
+        </p:spPr>
+        <p:txBody>
+          <a:bodyPr wrap="square" lIns="0" rIns="0" tIns="0" bIns="0" anchor="t">
+            <a:spAutoFit/>
+          </a:bodyPr>
+          <a:lstStyle/>
+          <a:p>
+            <a:pPr algn="r">
+              <a:lnSpc>
+                <a:spcPct val="100000"/>
+              </a:lnSpc>
+            </a:pPr>
+            <a:r>
+              <a:rPr sz="1150" b="0" i="0">
+                <a:solidFill>
+                  <a:srgbClr val="1F1F1F"/>
+                </a:solidFill>
+                <a:latin typeface="Arial"/>
+              </a:rPr>
+              <a:t>1 200 000</a:t>
+            </a:r>
+          </a:p>
+        </p:txBody>
+      </p:sp>
+      <p:sp>
+        <p:nvSpPr>
+          <p:cNvPr id="31" name="Rectangle 30"/>
+          <p:cNvSpPr/>
+          <p:nvPr/>
+        </p:nvSpPr>
+        <p:spPr>
+          <a:xfrm>
+            <a:off x="566928" y="4608576"/>
+            <a:ext cx="11064240" cy="420624"/>
+          </a:xfrm>
+          <a:prstGeom prst="rect">
+            <a:avLst/>
+          </a:prstGeom>
+          <a:solidFill>
+            <a:srgbClr val="F5F5F5"/>
+          </a:solidFill>
+          <a:ln>
+            <a:noFill/>
+          </a:ln>
+          <a:effectLst/>
+        </p:spPr>
+        <p:style>
+          <a:lnRef idx="1">
+            <a:schemeClr val="accent1"/>
+          </a:lnRef>
+          <a:fillRef idx="3">
+            <a:schemeClr val="accent1"/>
+          </a:fillRef>
+          <a:effectRef idx="2">
+            <a:schemeClr val="accent1"/>
+          </a:effectRef>
+          <a:fontRef idx="minor">
+            <a:schemeClr val="lt1"/>
+          </a:fontRef>
+        </p:style>
+        <p:txBody>
+          <a:bodyPr rtlCol="0" anchor="ctr"/>
+          <a:lstStyle/>
+          <a:p>
+            <a:pPr algn="ctr"/>
+          </a:p>
+        </p:txBody>
+      </p:sp>
+      <p:sp>
+        <p:nvSpPr>
+          <p:cNvPr id="32" name="TextBox 31"/>
+          <p:cNvSpPr txBox="1"/>
+          <p:nvPr/>
+        </p:nvSpPr>
+        <p:spPr>
+          <a:xfrm>
+            <a:off x="694944" y="4686300"/>
+            <a:ext cx="4901183" cy="420624"/>
+          </a:xfrm>
+          <a:prstGeom prst="rect">
+            <a:avLst/>
+          </a:prstGeom>
+          <a:noFill/>
+        </p:spPr>
+        <p:txBody>
+          <a:bodyPr wrap="square" lIns="0" rIns="0" tIns="0" bIns="0" anchor="t">
+            <a:spAutoFit/>
+          </a:bodyPr>
+          <a:lstStyle/>
+          <a:p>
+            <a:pPr algn="l">
+              <a:lnSpc>
+                <a:spcPct val="100000"/>
+              </a:lnSpc>
+            </a:pPr>
+            <a:r>
+              <a:rPr sz="1150" b="0" i="0">
+                <a:solidFill>
+                  <a:srgbClr val="1F1F1F"/>
+                </a:solidFill>
+                <a:latin typeface="Arial"/>
+              </a:rPr>
+              <a:t>Два рудника</a:t>
+            </a:r>
+          </a:p>
+        </p:txBody>
+      </p:sp>
+      <p:sp>
+        <p:nvSpPr>
+          <p:cNvPr id="33" name="TextBox 32"/>
+          <p:cNvSpPr txBox="1"/>
+          <p:nvPr/>
+        </p:nvSpPr>
+        <p:spPr>
+          <a:xfrm>
+            <a:off x="5815583" y="4686300"/>
+            <a:ext cx="1152144" cy="420624"/>
+          </a:xfrm>
+          <a:prstGeom prst="rect">
+            <a:avLst/>
+          </a:prstGeom>
+          <a:noFill/>
+        </p:spPr>
+        <p:txBody>
+          <a:bodyPr wrap="square" lIns="0" rIns="0" tIns="0" bIns="0" anchor="t">
+            <a:spAutoFit/>
+          </a:bodyPr>
+          <a:lstStyle/>
+          <a:p>
+            <a:pPr algn="ctr">
+              <a:lnSpc>
+                <a:spcPct val="100000"/>
+              </a:lnSpc>
+            </a:pPr>
+            <a:r>
+              <a:rPr sz="1150" b="0" i="0">
+                <a:solidFill>
+                  <a:srgbClr val="1F1F1F"/>
+                </a:solidFill>
+                <a:latin typeface="Arial"/>
+              </a:rPr>
+              <a:t>10</a:t>
+            </a:r>
+          </a:p>
+        </p:txBody>
+      </p:sp>
+      <p:sp>
+        <p:nvSpPr>
+          <p:cNvPr id="34" name="TextBox 33"/>
+          <p:cNvSpPr txBox="1"/>
+          <p:nvPr/>
+        </p:nvSpPr>
+        <p:spPr>
+          <a:xfrm>
+            <a:off x="7187183" y="4686300"/>
+            <a:ext cx="1426464" cy="420624"/>
+          </a:xfrm>
+          <a:prstGeom prst="rect">
+            <a:avLst/>
+          </a:prstGeom>
+          <a:noFill/>
+        </p:spPr>
+        <p:txBody>
+          <a:bodyPr wrap="square" lIns="0" rIns="0" tIns="0" bIns="0" anchor="t">
+            <a:spAutoFit/>
+          </a:bodyPr>
+          <a:lstStyle/>
+          <a:p>
+            <a:pPr algn="ctr">
+              <a:lnSpc>
+                <a:spcPct val="100000"/>
+              </a:lnSpc>
+            </a:pPr>
+            <a:r>
+              <a:rPr sz="1150" b="0" i="0">
+                <a:solidFill>
+                  <a:srgbClr val="1F1F1F"/>
+                </a:solidFill>
+                <a:latin typeface="Arial"/>
+              </a:rPr>
+              <a:t>2</a:t>
+            </a:r>
+          </a:p>
+        </p:txBody>
+      </p:sp>
+      <p:sp>
+        <p:nvSpPr>
+          <p:cNvPr id="35" name="TextBox 34"/>
+          <p:cNvSpPr txBox="1"/>
+          <p:nvPr/>
+        </p:nvSpPr>
+        <p:spPr>
+          <a:xfrm>
+            <a:off x="8833104" y="4686300"/>
+            <a:ext cx="2706624" cy="420624"/>
+          </a:xfrm>
+          <a:prstGeom prst="rect">
+            <a:avLst/>
+          </a:prstGeom>
+          <a:noFill/>
+        </p:spPr>
+        <p:txBody>
+          <a:bodyPr wrap="square" lIns="0" rIns="0" tIns="0" bIns="0" anchor="t">
+            <a:spAutoFit/>
+          </a:bodyPr>
+          <a:lstStyle/>
+          <a:p>
+            <a:pPr algn="r">
+              <a:lnSpc>
+                <a:spcPct val="100000"/>
+              </a:lnSpc>
+            </a:pPr>
+            <a:r>
+              <a:rPr sz="1150" b="0" i="0">
+                <a:solidFill>
+                  <a:srgbClr val="1F1F1F"/>
+                </a:solidFill>
+                <a:latin typeface="Arial"/>
+              </a:rPr>
+              <a:t>2 400 000</a:t>
+            </a:r>
+          </a:p>
+        </p:txBody>
+      </p:sp>
+      <p:sp>
+        <p:nvSpPr>
+          <p:cNvPr id="36" name="TextBox 35"/>
+          <p:cNvSpPr txBox="1"/>
+          <p:nvPr/>
+        </p:nvSpPr>
+        <p:spPr>
+          <a:xfrm>
+            <a:off x="694944" y="5106924"/>
+            <a:ext cx="4901183" cy="420624"/>
+          </a:xfrm>
+          <a:prstGeom prst="rect">
+            <a:avLst/>
+          </a:prstGeom>
+          <a:noFill/>
+        </p:spPr>
+        <p:txBody>
+          <a:bodyPr wrap="square" lIns="0" rIns="0" tIns="0" bIns="0" anchor="t">
+            <a:spAutoFit/>
+          </a:bodyPr>
+          <a:lstStyle/>
+          <a:p>
+            <a:pPr algn="l">
+              <a:lnSpc>
+                <a:spcPct val="100000"/>
+              </a:lnSpc>
+            </a:pPr>
+            <a:r>
+              <a:rPr sz="1150" b="0" i="0">
+                <a:solidFill>
+                  <a:srgbClr val="1F1F1F"/>
+                </a:solidFill>
+                <a:latin typeface="Arial"/>
+              </a:rPr>
+              <a:t>Три рудника и отряд ВГСЧ</a:t>
+            </a:r>
+          </a:p>
+        </p:txBody>
+      </p:sp>
+      <p:sp>
+        <p:nvSpPr>
+          <p:cNvPr id="37" name="TextBox 36"/>
+          <p:cNvSpPr txBox="1"/>
+          <p:nvPr/>
+        </p:nvSpPr>
+        <p:spPr>
+          <a:xfrm>
+            <a:off x="5815583" y="5106924"/>
+            <a:ext cx="1152144" cy="420624"/>
+          </a:xfrm>
+          <a:prstGeom prst="rect">
+            <a:avLst/>
+          </a:prstGeom>
+          <a:noFill/>
+        </p:spPr>
+        <p:txBody>
+          <a:bodyPr wrap="square" lIns="0" rIns="0" tIns="0" bIns="0" anchor="t">
+            <a:spAutoFit/>
+          </a:bodyPr>
+          <a:lstStyle/>
+          <a:p>
+            <a:pPr algn="ctr">
+              <a:lnSpc>
+                <a:spcPct val="100000"/>
+              </a:lnSpc>
+            </a:pPr>
+            <a:r>
+              <a:rPr sz="1150" b="0" i="0">
+                <a:solidFill>
+                  <a:srgbClr val="1F1F1F"/>
+                </a:solidFill>
+                <a:latin typeface="Arial"/>
+              </a:rPr>
+              <a:t>20</a:t>
+            </a:r>
+          </a:p>
+        </p:txBody>
+      </p:sp>
+      <p:sp>
+        <p:nvSpPr>
+          <p:cNvPr id="38" name="TextBox 37"/>
+          <p:cNvSpPr txBox="1"/>
+          <p:nvPr/>
+        </p:nvSpPr>
+        <p:spPr>
+          <a:xfrm>
+            <a:off x="7187183" y="5106924"/>
+            <a:ext cx="1426464" cy="420624"/>
+          </a:xfrm>
+          <a:prstGeom prst="rect">
+            <a:avLst/>
+          </a:prstGeom>
+          <a:noFill/>
+        </p:spPr>
+        <p:txBody>
+          <a:bodyPr wrap="square" lIns="0" rIns="0" tIns="0" bIns="0" anchor="t">
+            <a:spAutoFit/>
+          </a:bodyPr>
+          <a:lstStyle/>
+          <a:p>
+            <a:pPr algn="ctr">
+              <a:lnSpc>
+                <a:spcPct val="100000"/>
+              </a:lnSpc>
+            </a:pPr>
+            <a:r>
+              <a:rPr sz="1150" b="0" i="0">
+                <a:solidFill>
+                  <a:srgbClr val="1F1F1F"/>
+                </a:solidFill>
+                <a:latin typeface="Arial"/>
+              </a:rPr>
+              <a:t>4</a:t>
+            </a:r>
+          </a:p>
+        </p:txBody>
+      </p:sp>
+      <p:sp>
+        <p:nvSpPr>
+          <p:cNvPr id="39" name="TextBox 38"/>
+          <p:cNvSpPr txBox="1"/>
+          <p:nvPr/>
+        </p:nvSpPr>
+        <p:spPr>
+          <a:xfrm>
+            <a:off x="8833104" y="5106924"/>
+            <a:ext cx="2706624" cy="420624"/>
+          </a:xfrm>
+          <a:prstGeom prst="rect">
+            <a:avLst/>
+          </a:prstGeom>
+          <a:noFill/>
+        </p:spPr>
+        <p:txBody>
+          <a:bodyPr wrap="square" lIns="0" rIns="0" tIns="0" bIns="0" anchor="t">
+            <a:spAutoFit/>
+          </a:bodyPr>
+          <a:lstStyle/>
+          <a:p>
+            <a:pPr algn="r">
+              <a:lnSpc>
+                <a:spcPct val="100000"/>
+              </a:lnSpc>
+            </a:pPr>
+            <a:r>
+              <a:rPr sz="1150" b="0" i="0">
+                <a:solidFill>
+                  <a:srgbClr val="1F1F1F"/>
+                </a:solidFill>
+                <a:latin typeface="Arial"/>
+              </a:rPr>
+              <a:t>4 800 000</a:t>
+            </a:r>
+          </a:p>
+        </p:txBody>
+      </p:sp>
+      <p:sp>
+        <p:nvSpPr>
+          <p:cNvPr id="40" name="Rectangle 39"/>
+          <p:cNvSpPr/>
+          <p:nvPr/>
+        </p:nvSpPr>
+        <p:spPr>
+          <a:xfrm>
+            <a:off x="566928" y="5449824"/>
+            <a:ext cx="11064240" cy="420624"/>
+          </a:xfrm>
+          <a:prstGeom prst="rect">
+            <a:avLst/>
+          </a:prstGeom>
+          <a:solidFill>
+            <a:srgbClr val="F5F5F5"/>
+          </a:solidFill>
+          <a:ln>
+            <a:noFill/>
+          </a:ln>
+          <a:effectLst/>
+        </p:spPr>
+        <p:style>
+          <a:lnRef idx="1">
+            <a:schemeClr val="accent1"/>
+          </a:lnRef>
+          <a:fillRef idx="3">
+            <a:schemeClr val="accent1"/>
+          </a:fillRef>
+          <a:effectRef idx="2">
+            <a:schemeClr val="accent1"/>
+          </a:effectRef>
+          <a:fontRef idx="minor">
+            <a:schemeClr val="lt1"/>
+          </a:fontRef>
+        </p:style>
+        <p:txBody>
+          <a:bodyPr rtlCol="0" anchor="ctr"/>
+          <a:lstStyle/>
+          <a:p>
+            <a:pPr algn="ctr"/>
+          </a:p>
+        </p:txBody>
+      </p:sp>
+      <p:sp>
+        <p:nvSpPr>
+          <p:cNvPr id="41" name="TextBox 40"/>
+          <p:cNvSpPr txBox="1"/>
+          <p:nvPr/>
+        </p:nvSpPr>
+        <p:spPr>
+          <a:xfrm>
+            <a:off x="694944" y="5527548"/>
+            <a:ext cx="4901183" cy="420624"/>
+          </a:xfrm>
+          <a:prstGeom prst="rect">
+            <a:avLst/>
+          </a:prstGeom>
+          <a:noFill/>
+        </p:spPr>
+        <p:txBody>
+          <a:bodyPr wrap="square" lIns="0" rIns="0" tIns="0" bIns="0" anchor="t">
+            <a:spAutoFit/>
+          </a:bodyPr>
+          <a:lstStyle/>
+          <a:p>
+            <a:pPr algn="l">
+              <a:lnSpc>
+                <a:spcPct val="100000"/>
+              </a:lnSpc>
+            </a:pPr>
+            <a:r>
+              <a:rPr sz="1150" b="0" i="0">
+                <a:solidFill>
+                  <a:srgbClr val="1F1F1F"/>
+                </a:solidFill>
+                <a:latin typeface="Arial"/>
+              </a:rPr>
+              <a:t>Пять рудников, ВГСЧ и управляющая компания</a:t>
+            </a:r>
+          </a:p>
+        </p:txBody>
+      </p:sp>
+      <p:sp>
+        <p:nvSpPr>
+          <p:cNvPr id="42" name="TextBox 41"/>
+          <p:cNvSpPr txBox="1"/>
+          <p:nvPr/>
+        </p:nvSpPr>
+        <p:spPr>
+          <a:xfrm>
+            <a:off x="5815583" y="5527548"/>
+            <a:ext cx="1152144" cy="420624"/>
+          </a:xfrm>
+          <a:prstGeom prst="rect">
+            <a:avLst/>
+          </a:prstGeom>
+          <a:noFill/>
+        </p:spPr>
+        <p:txBody>
+          <a:bodyPr wrap="square" lIns="0" rIns="0" tIns="0" bIns="0" anchor="t">
+            <a:spAutoFit/>
+          </a:bodyPr>
+          <a:lstStyle/>
+          <a:p>
+            <a:pPr algn="ctr">
+              <a:lnSpc>
+                <a:spcPct val="100000"/>
+              </a:lnSpc>
+            </a:pPr>
+            <a:r>
+              <a:rPr sz="1150" b="0" i="0">
+                <a:solidFill>
+                  <a:srgbClr val="1F1F1F"/>
+                </a:solidFill>
+                <a:latin typeface="Arial"/>
+              </a:rPr>
+              <a:t>30</a:t>
+            </a:r>
+          </a:p>
+        </p:txBody>
+      </p:sp>
+      <p:sp>
+        <p:nvSpPr>
+          <p:cNvPr id="43" name="TextBox 42"/>
+          <p:cNvSpPr txBox="1"/>
+          <p:nvPr/>
+        </p:nvSpPr>
+        <p:spPr>
+          <a:xfrm>
+            <a:off x="7187183" y="5527548"/>
+            <a:ext cx="1426464" cy="420624"/>
+          </a:xfrm>
+          <a:prstGeom prst="rect">
+            <a:avLst/>
+          </a:prstGeom>
+          <a:noFill/>
+        </p:spPr>
+        <p:txBody>
+          <a:bodyPr wrap="square" lIns="0" rIns="0" tIns="0" bIns="0" anchor="t">
+            <a:spAutoFit/>
+          </a:bodyPr>
+          <a:lstStyle/>
+          <a:p>
+            <a:pPr algn="ctr">
+              <a:lnSpc>
+                <a:spcPct val="100000"/>
+              </a:lnSpc>
+            </a:pPr>
+            <a:r>
+              <a:rPr sz="1150" b="0" i="0">
+                <a:solidFill>
+                  <a:srgbClr val="1F1F1F"/>
+                </a:solidFill>
+                <a:latin typeface="Arial"/>
+              </a:rPr>
+              <a:t>6</a:t>
+            </a:r>
+          </a:p>
+        </p:txBody>
+      </p:sp>
+      <p:sp>
+        <p:nvSpPr>
+          <p:cNvPr id="44" name="TextBox 43"/>
+          <p:cNvSpPr txBox="1"/>
+          <p:nvPr/>
+        </p:nvSpPr>
+        <p:spPr>
+          <a:xfrm>
+            <a:off x="8833104" y="5527548"/>
+            <a:ext cx="2706624" cy="420624"/>
+          </a:xfrm>
+          <a:prstGeom prst="rect">
+            <a:avLst/>
+          </a:prstGeom>
+          <a:noFill/>
+        </p:spPr>
+        <p:txBody>
+          <a:bodyPr wrap="square" lIns="0" rIns="0" tIns="0" bIns="0" anchor="t">
+            <a:spAutoFit/>
+          </a:bodyPr>
+          <a:lstStyle/>
+          <a:p>
+            <a:pPr algn="r">
+              <a:lnSpc>
+                <a:spcPct val="100000"/>
+              </a:lnSpc>
+            </a:pPr>
+            <a:r>
+              <a:rPr sz="1150" b="0" i="0">
+                <a:solidFill>
+                  <a:srgbClr val="1F1F1F"/>
+                </a:solidFill>
+                <a:latin typeface="Arial"/>
+              </a:rPr>
+              <a:t>7 200 000</a:t>
+            </a:r>
+          </a:p>
+        </p:txBody>
+      </p:sp>
+      <p:sp>
+        <p:nvSpPr>
+          <p:cNvPr id="45" name="TextBox 44"/>
+          <p:cNvSpPr txBox="1"/>
+          <p:nvPr/>
+        </p:nvSpPr>
+        <p:spPr>
+          <a:xfrm>
+            <a:off x="694944" y="5948172"/>
+            <a:ext cx="4901183" cy="420624"/>
+          </a:xfrm>
+          <a:prstGeom prst="rect">
+            <a:avLst/>
+          </a:prstGeom>
+          <a:noFill/>
+        </p:spPr>
+        <p:txBody>
+          <a:bodyPr wrap="square" lIns="0" rIns="0" tIns="0" bIns="0" anchor="t">
+            <a:spAutoFit/>
+          </a:bodyPr>
+          <a:lstStyle/>
+          <a:p>
+            <a:pPr algn="l">
+              <a:lnSpc>
+                <a:spcPct val="100000"/>
+              </a:lnSpc>
+            </a:pPr>
+            <a:r>
+              <a:rPr sz="1150" b="0" i="0">
+                <a:solidFill>
+                  <a:srgbClr val="1F1F1F"/>
+                </a:solidFill>
+                <a:latin typeface="Arial"/>
+              </a:rPr>
+              <a:t>Группа предприятий полностью</a:t>
+            </a:r>
+          </a:p>
+        </p:txBody>
+      </p:sp>
+      <p:sp>
+        <p:nvSpPr>
+          <p:cNvPr id="46" name="TextBox 45"/>
+          <p:cNvSpPr txBox="1"/>
+          <p:nvPr/>
+        </p:nvSpPr>
+        <p:spPr>
+          <a:xfrm>
+            <a:off x="5815583" y="5948172"/>
+            <a:ext cx="1152144" cy="420624"/>
+          </a:xfrm>
+          <a:prstGeom prst="rect">
+            <a:avLst/>
+          </a:prstGeom>
+          <a:noFill/>
+        </p:spPr>
+        <p:txBody>
+          <a:bodyPr wrap="square" lIns="0" rIns="0" tIns="0" bIns="0" anchor="t">
+            <a:spAutoFit/>
+          </a:bodyPr>
+          <a:lstStyle/>
+          <a:p>
+            <a:pPr algn="ctr">
+              <a:lnSpc>
+                <a:spcPct val="100000"/>
+              </a:lnSpc>
+            </a:pPr>
+            <a:r>
+              <a:rPr sz="1150" b="0" i="0">
+                <a:solidFill>
+                  <a:srgbClr val="1F1F1F"/>
+                </a:solidFill>
+                <a:latin typeface="Arial"/>
+              </a:rPr>
+              <a:t>50</a:t>
+            </a:r>
+          </a:p>
+        </p:txBody>
+      </p:sp>
+      <p:sp>
+        <p:nvSpPr>
+          <p:cNvPr id="47" name="TextBox 46"/>
+          <p:cNvSpPr txBox="1"/>
+          <p:nvPr/>
+        </p:nvSpPr>
+        <p:spPr>
+          <a:xfrm>
+            <a:off x="7187183" y="5948172"/>
+            <a:ext cx="1426464" cy="420624"/>
+          </a:xfrm>
+          <a:prstGeom prst="rect">
+            <a:avLst/>
+          </a:prstGeom>
+          <a:noFill/>
+        </p:spPr>
+        <p:txBody>
+          <a:bodyPr wrap="square" lIns="0" rIns="0" tIns="0" bIns="0" anchor="t">
+            <a:spAutoFit/>
+          </a:bodyPr>
+          <a:lstStyle/>
+          <a:p>
+            <a:pPr algn="ctr">
+              <a:lnSpc>
+                <a:spcPct val="100000"/>
+              </a:lnSpc>
+            </a:pPr>
+            <a:r>
+              <a:rPr sz="1150" b="0" i="0">
+                <a:solidFill>
+                  <a:srgbClr val="1F1F1F"/>
+                </a:solidFill>
+                <a:latin typeface="Arial"/>
+              </a:rPr>
+              <a:t>10</a:t>
+            </a:r>
+          </a:p>
+        </p:txBody>
+      </p:sp>
+      <p:sp>
+        <p:nvSpPr>
+          <p:cNvPr id="48" name="TextBox 47"/>
+          <p:cNvSpPr txBox="1"/>
+          <p:nvPr/>
+        </p:nvSpPr>
+        <p:spPr>
+          <a:xfrm>
+            <a:off x="8833104" y="5948172"/>
+            <a:ext cx="2706624" cy="420624"/>
+          </a:xfrm>
+          <a:prstGeom prst="rect">
+            <a:avLst/>
+          </a:prstGeom>
+          <a:noFill/>
+        </p:spPr>
+        <p:txBody>
+          <a:bodyPr wrap="square" lIns="0" rIns="0" tIns="0" bIns="0" anchor="t">
+            <a:spAutoFit/>
+          </a:bodyPr>
+          <a:lstStyle/>
+          <a:p>
+            <a:pPr algn="r">
+              <a:lnSpc>
+                <a:spcPct val="100000"/>
+              </a:lnSpc>
+            </a:pPr>
+            <a:r>
+              <a:rPr sz="1150" b="0" i="0">
+                <a:solidFill>
+                  <a:srgbClr val="1F1F1F"/>
+                </a:solidFill>
+                <a:latin typeface="Arial"/>
+              </a:rPr>
+              <a:t>12 000 000</a:t>
+            </a:r>
+          </a:p>
+        </p:txBody>
+      </p:sp>
+      <p:sp>
+        <p:nvSpPr>
+          <p:cNvPr id="49" name="TextBox 48"/>
+          <p:cNvSpPr txBox="1"/>
+          <p:nvPr/>
+        </p:nvSpPr>
+        <p:spPr>
+          <a:xfrm>
+            <a:off x="566928" y="6035040"/>
+            <a:ext cx="11064240" cy="256032"/>
+          </a:xfrm>
+          <a:prstGeom prst="rect">
+            <a:avLst/>
+          </a:prstGeom>
+          <a:noFill/>
+        </p:spPr>
+        <p:txBody>
+          <a:bodyPr wrap="square" lIns="0" rIns="0" tIns="0" bIns="0" anchor="t">
+            <a:spAutoFit/>
+          </a:bodyPr>
+          <a:lstStyle/>
+          <a:p>
+            <a:pPr algn="l">
+              <a:lnSpc>
+                <a:spcPct val="100000"/>
+              </a:lnSpc>
+            </a:pPr>
+            <a:r>
+              <a:rPr sz="950" b="0" i="1">
+                <a:solidFill>
+                  <a:srgbClr val="5A6372"/>
+                </a:solidFill>
+                <a:latin typeface="Arial"/>
+              </a:rPr>
+              <a:t>Расчёт по базовой цене предложения. Условия для группы предприятий обсуждаются отдельно. НДС не облагается — пп. 26 п. 2 ст. 149 НК РФ.</a:t>
+            </a:r>
+          </a:p>
+        </p:txBody>
+      </p:sp>
+      <p:sp>
+        <p:nvSpPr>
+          <p:cNvPr id="50" name="Rectangle 49"/>
+          <p:cNvSpPr/>
+          <p:nvPr/>
+        </p:nvSpPr>
+        <p:spPr>
+          <a:xfrm>
+            <a:off x="0" y="6528816"/>
+            <a:ext cx="12191695" cy="329184"/>
+          </a:xfrm>
+          <a:prstGeom prst="rect">
+            <a:avLst/>
+          </a:prstGeom>
+          <a:solidFill>
+            <a:srgbClr val="F5F5F5"/>
+          </a:solidFill>
+          <a:ln>
+            <a:noFill/>
+          </a:ln>
+          <a:effectLst/>
+        </p:spPr>
+        <p:style>
+          <a:lnRef idx="1">
+            <a:schemeClr val="accent1"/>
+          </a:lnRef>
+          <a:fillRef idx="3">
+            <a:schemeClr val="accent1"/>
+          </a:fillRef>
+          <a:effectRef idx="2">
+            <a:schemeClr val="accent1"/>
+          </a:effectRef>
+          <a:fontRef idx="minor">
+            <a:schemeClr val="lt1"/>
+          </a:fontRef>
+        </p:style>
+        <p:txBody>
+          <a:bodyPr rtlCol="0" anchor="ctr"/>
+          <a:lstStyle/>
+          <a:p>
+            <a:pPr algn="ctr"/>
+          </a:p>
+        </p:txBody>
+      </p:sp>
+      <p:sp>
+        <p:nvSpPr>
+          <p:cNvPr id="51" name="TextBox 50"/>
+          <p:cNvSpPr txBox="1"/>
+          <p:nvPr/>
+        </p:nvSpPr>
+        <p:spPr>
+          <a:xfrm>
+            <a:off x="566928" y="6592824"/>
+            <a:ext cx="7315200" cy="219456"/>
+          </a:xfrm>
+          <a:prstGeom prst="rect">
+            <a:avLst/>
+          </a:prstGeom>
+          <a:noFill/>
+        </p:spPr>
+        <p:txBody>
+          <a:bodyPr wrap="square" lIns="0" rIns="0" tIns="0" bIns="0" anchor="t">
+            <a:spAutoFit/>
+          </a:bodyPr>
+          <a:lstStyle/>
+          <a:p>
+            <a:pPr algn="l">
+              <a:lnSpc>
+                <a:spcPct val="100000"/>
+              </a:lnSpc>
+            </a:pPr>
+            <a:r>
+              <a:rPr sz="950" b="0" i="0">
+                <a:solidFill>
+                  <a:srgbClr val="5A6372"/>
+                </a:solidFill>
+                <a:latin typeface="Arial"/>
+              </a:rPr>
+              <a:t>Стоимость лицензий</a:t>
+            </a:r>
+          </a:p>
+        </p:txBody>
+      </p:sp>
+      <p:sp>
+        <p:nvSpPr>
+          <p:cNvPr id="52" name="TextBox 51"/>
+          <p:cNvSpPr txBox="1"/>
+          <p:nvPr/>
+        </p:nvSpPr>
+        <p:spPr>
+          <a:xfrm>
+            <a:off x="9082735" y="6592824"/>
+            <a:ext cx="2560320" cy="219456"/>
+          </a:xfrm>
+          <a:prstGeom prst="rect">
+            <a:avLst/>
+          </a:prstGeom>
+          <a:noFill/>
+        </p:spPr>
+        <p:txBody>
+          <a:bodyPr wrap="square" lIns="0" rIns="0" tIns="0" bIns="0" anchor="t">
+            <a:spAutoFit/>
+          </a:bodyPr>
+          <a:lstStyle/>
+          <a:p>
+            <a:pPr algn="r">
+              <a:lnSpc>
+                <a:spcPct val="100000"/>
+              </a:lnSpc>
+            </a:pPr>
+            <a:r>
+              <a:rPr sz="950" b="1" i="0">
+                <a:solidFill>
+                  <a:srgbClr val="1A3A6B"/>
+                </a:solidFill>
+                <a:latin typeface="Arial"/>
+              </a:rPr>
+              <a:t>ПВ-Система · Лицензирование</a:t>
+            </a:r>
+          </a:p>
+        </p:txBody>
+      </p:sp>
+    </p:spTree>
+  </p:cSld>
+  <p:clrMapOvr>
+    <a:masterClrMapping/>
+  </p:clrMapOvr>
+</p:sld>
+</file>
+
+<file path=ppt/slides/slide13.xml><?xml version="1.0" encoding="utf-8"?>
 <p:sld xmlns:a="http://schemas.openxmlformats.org/drawingml/2006/main" xmlns:p="http://schemas.openxmlformats.org/presentationml/2006/main" xmlns:r="http://schemas.openxmlformats.org/officeDocument/2006/relationships">
   <p:cSld>
     <p:spTree>
